--- a/docs/wine-fund/WineBank_ワイン現物投資のご提案_倉持案_固定リターン型_1億円_20260821.pptx
+++ b/docs/wine-fund/WineBank_ワイン現物投資のご提案_倉持案_固定リターン型_1億円_20260821.pptx
@@ -287,16 +287,16 @@
                 <c:formatCode>General</c:formatCode>
                 <c:ptCount val="4"/>
                 <c:pt idx="0">
-                  <c:v>16.1</c:v>
+                  <c:v>16.3</c:v>
                 </c:pt>
                 <c:pt idx="1">
-                  <c:v>15.7</c:v>
+                  <c:v>13.2</c:v>
                 </c:pt>
                 <c:pt idx="2">
-                  <c:v>16.4</c:v>
+                  <c:v>12</c:v>
                 </c:pt>
                 <c:pt idx="3">
-                  <c:v>16.7</c:v>
+                  <c:v>11.5</c:v>
                 </c:pt>
               </c:numCache>
             </c:numRef>
@@ -4794,7 +4794,7 @@
                           <a:ea typeface="Yu Gothic" pitchFamily="34" charset="-122"/>
                           <a:cs typeface="Yu Gothic" pitchFamily="34" charset="-120"/>
                         </a:rPr>
-                        <a:t>▲1.14億円</a:t>
+                        <a:t>▲1.12億円</a:t>
                       </a:r>
                       <a:endParaRPr lang="en-US" sz="850" dirty="0">
                         <a:latin typeface="Yu Gothic" charset="0"/>
@@ -4998,7 +4998,7 @@
                           <a:ea typeface="Yu Gothic" pitchFamily="34" charset="-122"/>
                           <a:cs typeface="Yu Gothic" pitchFamily="34" charset="-120"/>
                         </a:rPr>
-                        <a:t>1,443万円</a:t>
+                        <a:t>1,643万円</a:t>
                       </a:r>
                       <a:endParaRPr lang="en-US" sz="850" dirty="0">
                         <a:latin typeface="Yu Gothic" charset="0"/>
@@ -5134,7 +5134,7 @@
                           <a:ea typeface="Yu Gothic" pitchFamily="34" charset="-122"/>
                           <a:cs typeface="Yu Gothic" pitchFamily="34" charset="-120"/>
                         </a:rPr>
-                        <a:t>1,919万円</a:t>
+                        <a:t>2,119万円</a:t>
                       </a:r>
                       <a:endParaRPr lang="en-US" sz="850" dirty="0">
                         <a:latin typeface="Yu Gothic" charset="0"/>
@@ -5340,7 +5340,7 @@
                           <a:ea typeface="Yu Gothic" pitchFamily="34" charset="-122"/>
                           <a:cs typeface="Yu Gothic" pitchFamily="34" charset="-120"/>
                         </a:rPr>
-                        <a:t>▲1.20億円</a:t>
+                        <a:t>▲1.15億円</a:t>
                       </a:r>
                       <a:endParaRPr lang="en-US" sz="850" dirty="0">
                         <a:latin typeface="Yu Gothic" charset="0"/>
@@ -5544,7 +5544,7 @@
                           <a:ea typeface="Yu Gothic" pitchFamily="34" charset="-122"/>
                           <a:cs typeface="Yu Gothic" pitchFamily="34" charset="-120"/>
                         </a:rPr>
-                        <a:t>1,071万円</a:t>
+                        <a:t>1,571万円</a:t>
                       </a:r>
                       <a:endParaRPr lang="en-US" sz="850" dirty="0">
                         <a:latin typeface="Yu Gothic" charset="0"/>
@@ -5680,7 +5680,7 @@
                           <a:ea typeface="Yu Gothic" pitchFamily="34" charset="-122"/>
                           <a:cs typeface="Yu Gothic" pitchFamily="34" charset="-120"/>
                         </a:rPr>
-                        <a:t>1,547万円</a:t>
+                        <a:t>2,047万円</a:t>
                       </a:r>
                       <a:endParaRPr lang="en-US" sz="850" dirty="0">
                         <a:latin typeface="Yu Gothic" charset="0"/>
@@ -5886,7 +5886,7 @@
                           <a:ea typeface="Yu Gothic" pitchFamily="34" charset="-122"/>
                           <a:cs typeface="Yu Gothic" pitchFamily="34" charset="-120"/>
                         </a:rPr>
-                        <a:t>▲1.24億円</a:t>
+                        <a:t>▲1.17億円</a:t>
                       </a:r>
                       <a:endParaRPr lang="en-US" sz="850" dirty="0">
                         <a:latin typeface="Yu Gothic" charset="0"/>
@@ -6090,7 +6090,7 @@
                           <a:ea typeface="Yu Gothic" pitchFamily="34" charset="-122"/>
                           <a:cs typeface="Yu Gothic" pitchFamily="34" charset="-120"/>
                         </a:rPr>
-                        <a:t>823万円</a:t>
+                        <a:t>1,523万円</a:t>
                       </a:r>
                       <a:endParaRPr lang="en-US" sz="850" dirty="0">
                         <a:latin typeface="Yu Gothic" charset="0"/>
@@ -6226,7 +6226,7 @@
                           <a:ea typeface="Yu Gothic" pitchFamily="34" charset="-122"/>
                           <a:cs typeface="Yu Gothic" pitchFamily="34" charset="-120"/>
                         </a:rPr>
-                        <a:t>1,299万円</a:t>
+                        <a:t>1,999万円</a:t>
                       </a:r>
                       <a:endParaRPr lang="en-US" sz="850" dirty="0">
                         <a:latin typeface="Yu Gothic" charset="0"/>
@@ -6384,7 +6384,7 @@
                 <a:ea typeface="Yu Gothic" pitchFamily="34" charset="-122"/>
                 <a:cs typeface="Yu Gothic" pitchFamily="34" charset="-120"/>
               </a:rPr>
-              <a:t>1年以内に売り切れた場合の 2,166万円に対し、2年目にずれ込むほどWineBankの取り分は縮み、1年目30%・2年目70%では 1,299万円まで下がる。貴社へのお支払いが保有期間とともに増える一方、WineBankの売上はさほど増えないためである。早期に売り切る動機がWineBank側に強く働く構造としている。</a:t>
+              <a:t>1年以内に売り切れた場合の 2,166万円に対し、2年目にずれ込むほどWineBankの取り分は縮み、1年目30%・2年目70%では 1,999万円まで下がる。貴社へのお支払いが保有期間とともに増える一方、WineBankの売上はさほど増えないためである。早期に売り切る動機がWineBank側に強く働く構造としている。</a:t>
             </a:r>
             <a:endParaRPr lang="en-US" sz="950" dirty="0"/>
           </a:p>
@@ -7118,7 +7118,7 @@
                           <a:ea typeface="Yu Gothic" pitchFamily="34" charset="-122"/>
                           <a:cs typeface="Yu Gothic" pitchFamily="34" charset="-120"/>
                         </a:rPr>
-                        <a:t>1,160万円</a:t>
+                        <a:t>960万円</a:t>
                       </a:r>
                       <a:endParaRPr lang="en-US" sz="850" dirty="0">
                         <a:latin typeface="Yu Gothic" charset="0"/>
@@ -7186,7 +7186,7 @@
                           <a:ea typeface="Yu Gothic" pitchFamily="34" charset="-122"/>
                           <a:cs typeface="Yu Gothic" pitchFamily="34" charset="-120"/>
                         </a:rPr>
-                        <a:t>1,919万円</a:t>
+                        <a:t>2,119万円</a:t>
                       </a:r>
                       <a:endParaRPr lang="en-US" sz="850" dirty="0">
                         <a:latin typeface="Yu Gothic" charset="0"/>
@@ -7254,7 +7254,7 @@
                           <a:ea typeface="Yu Gothic" pitchFamily="34" charset="-122"/>
                           <a:cs typeface="Yu Gothic" pitchFamily="34" charset="-120"/>
                         </a:rPr>
-                        <a:t>38:62</a:t>
+                        <a:t>31:69</a:t>
                       </a:r>
                       <a:endParaRPr lang="en-US" sz="850" dirty="0">
                         <a:latin typeface="Yu Gothic" charset="0"/>
@@ -7392,7 +7392,7 @@
                           <a:ea typeface="Yu Gothic" pitchFamily="34" charset="-122"/>
                           <a:cs typeface="Yu Gothic" pitchFamily="34" charset="-120"/>
                         </a:rPr>
-                        <a:t>1,760万円</a:t>
+                        <a:t>1,260万円</a:t>
                       </a:r>
                       <a:endParaRPr lang="en-US" sz="850" dirty="0">
                         <a:latin typeface="Yu Gothic" charset="0"/>
@@ -7460,7 +7460,7 @@
                           <a:ea typeface="Yu Gothic" pitchFamily="34" charset="-122"/>
                           <a:cs typeface="Yu Gothic" pitchFamily="34" charset="-120"/>
                         </a:rPr>
-                        <a:t>1,547万円</a:t>
+                        <a:t>2,047万円</a:t>
                       </a:r>
                       <a:endParaRPr lang="en-US" sz="850" dirty="0">
                         <a:latin typeface="Yu Gothic" charset="0"/>
@@ -7528,7 +7528,7 @@
                           <a:ea typeface="Yu Gothic" pitchFamily="34" charset="-122"/>
                           <a:cs typeface="Yu Gothic" pitchFamily="34" charset="-120"/>
                         </a:rPr>
-                        <a:t>53:47</a:t>
+                        <a:t>38:62</a:t>
                       </a:r>
                       <a:endParaRPr lang="en-US" sz="850" dirty="0">
                         <a:latin typeface="Yu Gothic" charset="0"/>
@@ -7666,7 +7666,7 @@
                           <a:ea typeface="Yu Gothic" pitchFamily="34" charset="-122"/>
                           <a:cs typeface="Yu Gothic" pitchFamily="34" charset="-120"/>
                         </a:rPr>
-                        <a:t>2,160万円</a:t>
+                        <a:t>1,460万円</a:t>
                       </a:r>
                       <a:endParaRPr lang="en-US" sz="850" dirty="0">
                         <a:latin typeface="Yu Gothic" charset="0"/>
@@ -7734,7 +7734,7 @@
                           <a:ea typeface="Yu Gothic" pitchFamily="34" charset="-122"/>
                           <a:cs typeface="Yu Gothic" pitchFamily="34" charset="-120"/>
                         </a:rPr>
-                        <a:t>1,299万円</a:t>
+                        <a:t>1,999万円</a:t>
                       </a:r>
                       <a:endParaRPr lang="en-US" sz="850" dirty="0">
                         <a:latin typeface="Yu Gothic" charset="0"/>
@@ -7802,7 +7802,7 @@
                           <a:ea typeface="Yu Gothic" pitchFamily="34" charset="-122"/>
                           <a:cs typeface="Yu Gothic" pitchFamily="34" charset="-120"/>
                         </a:rPr>
-                        <a:t>62:38</a:t>
+                        <a:t>42:58</a:t>
                       </a:r>
                       <a:endParaRPr lang="en-US" sz="850" dirty="0">
                         <a:latin typeface="Yu Gothic" charset="0"/>
@@ -8160,7 +8160,7 @@
                 <a:ea typeface="Yu Gothic" pitchFamily="34" charset="-122"/>
                 <a:cs typeface="Yu Gothic" pitchFamily="34" charset="-120"/>
               </a:rPr>
-              <a:t>13〜24ヶ月を30%とした場合のWineBank合計</a:t>
+              <a:t>本案（10% / 20% / 30%）の場合のWineBank合計</a:t>
             </a:r>
             <a:endParaRPr lang="en-US" sz="950" dirty="0"/>
           </a:p>
@@ -8965,7 +8965,7 @@
                           <a:ea typeface="Yu Gothic" pitchFamily="34" charset="-122"/>
                           <a:cs typeface="Yu Gothic" pitchFamily="34" charset="-120"/>
                         </a:rPr>
-                        <a:t>1,919万円</a:t>
+                        <a:t>2,119万円</a:t>
                       </a:r>
                       <a:endParaRPr lang="en-US" sz="900" dirty="0">
                         <a:latin typeface="Yu Gothic" charset="0"/>
@@ -9033,7 +9033,7 @@
                           <a:ea typeface="Yu Gothic" pitchFamily="34" charset="-122"/>
                           <a:cs typeface="Yu Gothic" pitchFamily="34" charset="-120"/>
                         </a:rPr>
-                        <a:t>1,370万円</a:t>
+                        <a:t>1,570万円</a:t>
                       </a:r>
                       <a:endParaRPr lang="en-US" sz="900" dirty="0">
                         <a:latin typeface="Yu Gothic" charset="0"/>
@@ -9101,7 +9101,7 @@
                           <a:ea typeface="Yu Gothic" pitchFamily="34" charset="-122"/>
                           <a:cs typeface="Yu Gothic" pitchFamily="34" charset="-120"/>
                         </a:rPr>
-                        <a:t>1,277万円</a:t>
+                        <a:t>1,477万円</a:t>
                       </a:r>
                       <a:endParaRPr lang="en-US" sz="900" dirty="0">
                         <a:latin typeface="Yu Gothic" charset="0"/>
@@ -9169,7 +9169,7 @@
                           <a:ea typeface="Yu Gothic" pitchFamily="34" charset="-122"/>
                           <a:cs typeface="Yu Gothic" pitchFamily="34" charset="-120"/>
                         </a:rPr>
-                        <a:t>756万円</a:t>
+                        <a:t>956万円</a:t>
                       </a:r>
                       <a:endParaRPr lang="en-US" sz="900" dirty="0">
                         <a:latin typeface="Yu Gothic" charset="0"/>
@@ -9307,7 +9307,7 @@
                           <a:ea typeface="Yu Gothic" pitchFamily="34" charset="-122"/>
                           <a:cs typeface="Yu Gothic" pitchFamily="34" charset="-120"/>
                         </a:rPr>
-                        <a:t>1,547万円</a:t>
+                        <a:t>2,047万円</a:t>
                       </a:r>
                       <a:endParaRPr lang="en-US" sz="900" dirty="0">
                         <a:latin typeface="Yu Gothic" charset="0"/>
@@ -9375,7 +9375,7 @@
                           <a:ea typeface="Yu Gothic" pitchFamily="34" charset="-122"/>
                           <a:cs typeface="Yu Gothic" pitchFamily="34" charset="-120"/>
                         </a:rPr>
-                        <a:t>770万円</a:t>
+                        <a:t>1,270万円</a:t>
                       </a:r>
                       <a:endParaRPr lang="en-US" sz="900" dirty="0">
                         <a:latin typeface="Yu Gothic" charset="0"/>
@@ -9443,7 +9443,7 @@
                           <a:ea typeface="Yu Gothic" pitchFamily="34" charset="-122"/>
                           <a:cs typeface="Yu Gothic" pitchFamily="34" charset="-120"/>
                         </a:rPr>
-                        <a:t>894万円</a:t>
+                        <a:t>1,394万円</a:t>
                       </a:r>
                       <a:endParaRPr lang="en-US" sz="900" dirty="0">
                         <a:latin typeface="Yu Gothic" charset="0"/>
@@ -9505,13 +9505,13 @@
                       <a:r>
                         <a:rPr lang="en-US" sz="900" b="1" dirty="0">
                           <a:solidFill>
-                            <a:srgbClr val="EFEBE3"/>
+                            <a:srgbClr val="C9A96E"/>
                           </a:solidFill>
                           <a:latin typeface="Yu Gothic" pitchFamily="34" charset="0"/>
                           <a:ea typeface="Yu Gothic" pitchFamily="34" charset="-122"/>
                           <a:cs typeface="Yu Gothic" pitchFamily="34" charset="-120"/>
                         </a:rPr>
-                        <a:t>156万円</a:t>
+                        <a:t>656万円</a:t>
                       </a:r>
                       <a:endParaRPr lang="en-US" sz="900" dirty="0">
                         <a:latin typeface="Yu Gothic" charset="0"/>
@@ -9649,7 +9649,143 @@
                           <a:ea typeface="Yu Gothic" pitchFamily="34" charset="-122"/>
                           <a:cs typeface="Yu Gothic" pitchFamily="34" charset="-120"/>
                         </a:rPr>
-                        <a:t>1,299万円</a:t>
+                        <a:t>1,999万円</a:t>
+                      </a:r>
+                      <a:endParaRPr lang="en-US" sz="900" dirty="0">
+                        <a:latin typeface="Yu Gothic" charset="0"/>
+                        <a:ea typeface="Yu Gothic" charset="0"/>
+                        <a:cs typeface="Yu Gothic" charset="0"/>
+                      </a:endParaRPr>
+                    </a:p>
+                  </a:txBody>
+                  <a:tcPr marL="45720" marR="45720" marT="45720" marB="45720" anchor="ctr">
+                    <a:lnL w="7620" cap="flat" cmpd="sng" algn="ctr">
+                      <a:solidFill>
+                        <a:srgbClr val="2E2A24"/>
+                      </a:solidFill>
+                      <a:prstDash val="solid"/>
+                      <a:round/>
+                      <a:headEnd type="none" w="med" len="med"/>
+                      <a:tailEnd type="none" w="med" len="med"/>
+                    </a:lnL>
+                    <a:lnR w="7620" cap="flat" cmpd="sng" algn="ctr">
+                      <a:solidFill>
+                        <a:srgbClr val="2E2A24"/>
+                      </a:solidFill>
+                      <a:prstDash val="solid"/>
+                      <a:round/>
+                      <a:headEnd type="none" w="med" len="med"/>
+                      <a:tailEnd type="none" w="med" len="med"/>
+                    </a:lnR>
+                    <a:lnT w="7620" cap="flat" cmpd="sng" algn="ctr">
+                      <a:solidFill>
+                        <a:srgbClr val="2E2A24"/>
+                      </a:solidFill>
+                      <a:prstDash val="solid"/>
+                      <a:round/>
+                      <a:headEnd type="none" w="med" len="med"/>
+                      <a:tailEnd type="none" w="med" len="med"/>
+                    </a:lnT>
+                    <a:lnB w="7620" cap="flat" cmpd="sng" algn="ctr">
+                      <a:solidFill>
+                        <a:srgbClr val="2E2A24"/>
+                      </a:solidFill>
+                      <a:prstDash val="solid"/>
+                      <a:round/>
+                      <a:headEnd type="none" w="med" len="med"/>
+                      <a:tailEnd type="none" w="med" len="med"/>
+                    </a:lnB>
+                    <a:solidFill>
+                      <a:srgbClr val="171614"/>
+                    </a:solidFill>
+                  </a:tcPr>
+                </a:tc>
+                <a:tc>
+                  <a:txBody>
+                    <a:bodyPr/>
+                    <a:lstStyle/>
+                    <a:p>
+                      <a:pPr algn="ctr" indent="0" marL="0">
+                        <a:buNone/>
+                      </a:pPr>
+                      <a:r>
+                        <a:rPr lang="en-US" sz="900" b="1" dirty="0">
+                          <a:solidFill>
+                            <a:srgbClr val="C9A96E"/>
+                          </a:solidFill>
+                          <a:latin typeface="Yu Gothic" pitchFamily="34" charset="0"/>
+                          <a:ea typeface="Yu Gothic" pitchFamily="34" charset="-122"/>
+                          <a:cs typeface="Yu Gothic" pitchFamily="34" charset="-120"/>
+                        </a:rPr>
+                        <a:t>1,070万円</a:t>
+                      </a:r>
+                      <a:endParaRPr lang="en-US" sz="900" dirty="0">
+                        <a:latin typeface="Yu Gothic" charset="0"/>
+                        <a:ea typeface="Yu Gothic" charset="0"/>
+                        <a:cs typeface="Yu Gothic" charset="0"/>
+                      </a:endParaRPr>
+                    </a:p>
+                  </a:txBody>
+                  <a:tcPr marL="45720" marR="45720" marT="45720" marB="45720" anchor="ctr">
+                    <a:lnL w="7620" cap="flat" cmpd="sng" algn="ctr">
+                      <a:solidFill>
+                        <a:srgbClr val="2E2A24"/>
+                      </a:solidFill>
+                      <a:prstDash val="solid"/>
+                      <a:round/>
+                      <a:headEnd type="none" w="med" len="med"/>
+                      <a:tailEnd type="none" w="med" len="med"/>
+                    </a:lnL>
+                    <a:lnR w="7620" cap="flat" cmpd="sng" algn="ctr">
+                      <a:solidFill>
+                        <a:srgbClr val="2E2A24"/>
+                      </a:solidFill>
+                      <a:prstDash val="solid"/>
+                      <a:round/>
+                      <a:headEnd type="none" w="med" len="med"/>
+                      <a:tailEnd type="none" w="med" len="med"/>
+                    </a:lnR>
+                    <a:lnT w="7620" cap="flat" cmpd="sng" algn="ctr">
+                      <a:solidFill>
+                        <a:srgbClr val="2E2A24"/>
+                      </a:solidFill>
+                      <a:prstDash val="solid"/>
+                      <a:round/>
+                      <a:headEnd type="none" w="med" len="med"/>
+                      <a:tailEnd type="none" w="med" len="med"/>
+                    </a:lnT>
+                    <a:lnB w="7620" cap="flat" cmpd="sng" algn="ctr">
+                      <a:solidFill>
+                        <a:srgbClr val="2E2A24"/>
+                      </a:solidFill>
+                      <a:prstDash val="solid"/>
+                      <a:round/>
+                      <a:headEnd type="none" w="med" len="med"/>
+                      <a:tailEnd type="none" w="med" len="med"/>
+                    </a:lnB>
+                    <a:solidFill>
+                      <a:srgbClr val="171614"/>
+                    </a:solidFill>
+                  </a:tcPr>
+                </a:tc>
+                <a:tc>
+                  <a:txBody>
+                    <a:bodyPr/>
+                    <a:lstStyle/>
+                    <a:p>
+                      <a:pPr algn="ctr" indent="0" marL="0">
+                        <a:buNone/>
+                      </a:pPr>
+                      <a:r>
+                        <a:rPr lang="en-US" sz="900" b="1" dirty="0">
+                          <a:solidFill>
+                            <a:srgbClr val="C9A96E"/>
+                          </a:solidFill>
+                          <a:latin typeface="Yu Gothic" pitchFamily="34" charset="0"/>
+                          <a:ea typeface="Yu Gothic" pitchFamily="34" charset="-122"/>
+                          <a:cs typeface="Yu Gothic" pitchFamily="34" charset="-120"/>
+                        </a:rPr>
+                        <a:t>1,338万円</a:t>
                       </a:r>
                       <a:endParaRPr lang="en-US" sz="900" dirty="0">
                         <a:latin typeface="Yu Gothic" charset="0"/>
@@ -9717,143 +9853,7 @@
                           <a:ea typeface="Yu Gothic" pitchFamily="34" charset="-122"/>
                           <a:cs typeface="Yu Gothic" pitchFamily="34" charset="-120"/>
                         </a:rPr>
-                        <a:t>370万円</a:t>
-                      </a:r>
-                      <a:endParaRPr lang="en-US" sz="900" dirty="0">
-                        <a:latin typeface="Yu Gothic" charset="0"/>
-                        <a:ea typeface="Yu Gothic" charset="0"/>
-                        <a:cs typeface="Yu Gothic" charset="0"/>
-                      </a:endParaRPr>
-                    </a:p>
-                  </a:txBody>
-                  <a:tcPr marL="45720" marR="45720" marT="45720" marB="45720" anchor="ctr">
-                    <a:lnL w="7620" cap="flat" cmpd="sng" algn="ctr">
-                      <a:solidFill>
-                        <a:srgbClr val="2E2A24"/>
-                      </a:solidFill>
-                      <a:prstDash val="solid"/>
-                      <a:round/>
-                      <a:headEnd type="none" w="med" len="med"/>
-                      <a:tailEnd type="none" w="med" len="med"/>
-                    </a:lnL>
-                    <a:lnR w="7620" cap="flat" cmpd="sng" algn="ctr">
-                      <a:solidFill>
-                        <a:srgbClr val="2E2A24"/>
-                      </a:solidFill>
-                      <a:prstDash val="solid"/>
-                      <a:round/>
-                      <a:headEnd type="none" w="med" len="med"/>
-                      <a:tailEnd type="none" w="med" len="med"/>
-                    </a:lnR>
-                    <a:lnT w="7620" cap="flat" cmpd="sng" algn="ctr">
-                      <a:solidFill>
-                        <a:srgbClr val="2E2A24"/>
-                      </a:solidFill>
-                      <a:prstDash val="solid"/>
-                      <a:round/>
-                      <a:headEnd type="none" w="med" len="med"/>
-                      <a:tailEnd type="none" w="med" len="med"/>
-                    </a:lnT>
-                    <a:lnB w="7620" cap="flat" cmpd="sng" algn="ctr">
-                      <a:solidFill>
-                        <a:srgbClr val="2E2A24"/>
-                      </a:solidFill>
-                      <a:prstDash val="solid"/>
-                      <a:round/>
-                      <a:headEnd type="none" w="med" len="med"/>
-                      <a:tailEnd type="none" w="med" len="med"/>
-                    </a:lnB>
-                    <a:solidFill>
-                      <a:srgbClr val="171614"/>
-                    </a:solidFill>
-                  </a:tcPr>
-                </a:tc>
-                <a:tc>
-                  <a:txBody>
-                    <a:bodyPr/>
-                    <a:lstStyle/>
-                    <a:p>
-                      <a:pPr algn="ctr" indent="0" marL="0">
-                        <a:buNone/>
-                      </a:pPr>
-                      <a:r>
-                        <a:rPr lang="en-US" sz="900" b="1" dirty="0">
-                          <a:solidFill>
-                            <a:srgbClr val="C9A96E"/>
-                          </a:solidFill>
-                          <a:latin typeface="Yu Gothic" pitchFamily="34" charset="0"/>
-                          <a:ea typeface="Yu Gothic" pitchFamily="34" charset="-122"/>
-                          <a:cs typeface="Yu Gothic" pitchFamily="34" charset="-120"/>
-                        </a:rPr>
-                        <a:t>638万円</a:t>
-                      </a:r>
-                      <a:endParaRPr lang="en-US" sz="900" dirty="0">
-                        <a:latin typeface="Yu Gothic" charset="0"/>
-                        <a:ea typeface="Yu Gothic" charset="0"/>
-                        <a:cs typeface="Yu Gothic" charset="0"/>
-                      </a:endParaRPr>
-                    </a:p>
-                  </a:txBody>
-                  <a:tcPr marL="45720" marR="45720" marT="45720" marB="45720" anchor="ctr">
-                    <a:lnL w="7620" cap="flat" cmpd="sng" algn="ctr">
-                      <a:solidFill>
-                        <a:srgbClr val="2E2A24"/>
-                      </a:solidFill>
-                      <a:prstDash val="solid"/>
-                      <a:round/>
-                      <a:headEnd type="none" w="med" len="med"/>
-                      <a:tailEnd type="none" w="med" len="med"/>
-                    </a:lnL>
-                    <a:lnR w="7620" cap="flat" cmpd="sng" algn="ctr">
-                      <a:solidFill>
-                        <a:srgbClr val="2E2A24"/>
-                      </a:solidFill>
-                      <a:prstDash val="solid"/>
-                      <a:round/>
-                      <a:headEnd type="none" w="med" len="med"/>
-                      <a:tailEnd type="none" w="med" len="med"/>
-                    </a:lnR>
-                    <a:lnT w="7620" cap="flat" cmpd="sng" algn="ctr">
-                      <a:solidFill>
-                        <a:srgbClr val="2E2A24"/>
-                      </a:solidFill>
-                      <a:prstDash val="solid"/>
-                      <a:round/>
-                      <a:headEnd type="none" w="med" len="med"/>
-                      <a:tailEnd type="none" w="med" len="med"/>
-                    </a:lnT>
-                    <a:lnB w="7620" cap="flat" cmpd="sng" algn="ctr">
-                      <a:solidFill>
-                        <a:srgbClr val="2E2A24"/>
-                      </a:solidFill>
-                      <a:prstDash val="solid"/>
-                      <a:round/>
-                      <a:headEnd type="none" w="med" len="med"/>
-                      <a:tailEnd type="none" w="med" len="med"/>
-                    </a:lnB>
-                    <a:solidFill>
-                      <a:srgbClr val="171614"/>
-                    </a:solidFill>
-                  </a:tcPr>
-                </a:tc>
-                <a:tc>
-                  <a:txBody>
-                    <a:bodyPr/>
-                    <a:lstStyle/>
-                    <a:p>
-                      <a:pPr algn="ctr" indent="0" marL="0">
-                        <a:buNone/>
-                      </a:pPr>
-                      <a:r>
-                        <a:rPr lang="en-US" sz="900" b="1" dirty="0">
-                          <a:solidFill>
-                            <a:srgbClr val="B4553F"/>
-                          </a:solidFill>
-                          <a:latin typeface="Yu Gothic" pitchFamily="34" charset="0"/>
-                          <a:ea typeface="Yu Gothic" pitchFamily="34" charset="-122"/>
-                          <a:cs typeface="Yu Gothic" pitchFamily="34" charset="-120"/>
-                        </a:rPr>
-                        <a:t>▲244万円</a:t>
+                        <a:t>456万円</a:t>
                       </a:r>
                       <a:endParaRPr lang="en-US" sz="900" dirty="0">
                         <a:latin typeface="Yu Gothic" charset="0"/>
@@ -9942,7 +9942,7 @@
                 <a:ea typeface="Yu Gothic" pitchFamily="34" charset="-122"/>
                 <a:cs typeface="Yu Gothic" pitchFamily="34" charset="-120"/>
               </a:rPr>
-              <a:t>13〜24ヶ月を25%とした場合のWineBank合計</a:t>
+              <a:t>対比案（7.5% / 12.5% / 30.0%）の場合のWineBank合計</a:t>
             </a:r>
             <a:endParaRPr lang="en-US" sz="950" dirty="0"/>
           </a:p>
@@ -10747,7 +10747,7 @@
                           <a:ea typeface="Yu Gothic" pitchFamily="34" charset="-122"/>
                           <a:cs typeface="Yu Gothic" pitchFamily="34" charset="-120"/>
                         </a:rPr>
-                        <a:t>2,019万円</a:t>
+                        <a:t>1,919万円</a:t>
                       </a:r>
                       <a:endParaRPr lang="en-US" sz="900" dirty="0">
                         <a:latin typeface="Yu Gothic" charset="0"/>
@@ -10815,7 +10815,7 @@
                           <a:ea typeface="Yu Gothic" pitchFamily="34" charset="-122"/>
                           <a:cs typeface="Yu Gothic" pitchFamily="34" charset="-120"/>
                         </a:rPr>
-                        <a:t>1,470万円</a:t>
+                        <a:t>1,370万円</a:t>
                       </a:r>
                       <a:endParaRPr lang="en-US" sz="900" dirty="0">
                         <a:latin typeface="Yu Gothic" charset="0"/>
@@ -10883,7 +10883,7 @@
                           <a:ea typeface="Yu Gothic" pitchFamily="34" charset="-122"/>
                           <a:cs typeface="Yu Gothic" pitchFamily="34" charset="-120"/>
                         </a:rPr>
-                        <a:t>1,377万円</a:t>
+                        <a:t>1,277万円</a:t>
                       </a:r>
                       <a:endParaRPr lang="en-US" sz="900" dirty="0">
                         <a:latin typeface="Yu Gothic" charset="0"/>
@@ -10951,7 +10951,7 @@
                           <a:ea typeface="Yu Gothic" pitchFamily="34" charset="-122"/>
                           <a:cs typeface="Yu Gothic" pitchFamily="34" charset="-120"/>
                         </a:rPr>
-                        <a:t>856万円</a:t>
+                        <a:t>756万円</a:t>
                       </a:r>
                       <a:endParaRPr lang="en-US" sz="900" dirty="0">
                         <a:latin typeface="Yu Gothic" charset="0"/>
@@ -11089,7 +11089,7 @@
                           <a:ea typeface="Yu Gothic" pitchFamily="34" charset="-122"/>
                           <a:cs typeface="Yu Gothic" pitchFamily="34" charset="-120"/>
                         </a:rPr>
-                        <a:t>1,797万円</a:t>
+                        <a:t>1,547万円</a:t>
                       </a:r>
                       <a:endParaRPr lang="en-US" sz="900" dirty="0">
                         <a:latin typeface="Yu Gothic" charset="0"/>
@@ -11157,7 +11157,7 @@
                           <a:ea typeface="Yu Gothic" pitchFamily="34" charset="-122"/>
                           <a:cs typeface="Yu Gothic" pitchFamily="34" charset="-120"/>
                         </a:rPr>
-                        <a:t>1,020万円</a:t>
+                        <a:t>770万円</a:t>
                       </a:r>
                       <a:endParaRPr lang="en-US" sz="900" dirty="0">
                         <a:latin typeface="Yu Gothic" charset="0"/>
@@ -11225,7 +11225,7 @@
                           <a:ea typeface="Yu Gothic" pitchFamily="34" charset="-122"/>
                           <a:cs typeface="Yu Gothic" pitchFamily="34" charset="-120"/>
                         </a:rPr>
-                        <a:t>1,144万円</a:t>
+                        <a:t>894万円</a:t>
                       </a:r>
                       <a:endParaRPr lang="en-US" sz="900" dirty="0">
                         <a:latin typeface="Yu Gothic" charset="0"/>
@@ -11293,7 +11293,7 @@
                           <a:ea typeface="Yu Gothic" pitchFamily="34" charset="-122"/>
                           <a:cs typeface="Yu Gothic" pitchFamily="34" charset="-120"/>
                         </a:rPr>
-                        <a:t>406万円</a:t>
+                        <a:t>156万円</a:t>
                       </a:r>
                       <a:endParaRPr lang="en-US" sz="900" dirty="0">
                         <a:latin typeface="Yu Gothic" charset="0"/>
@@ -11431,7 +11431,75 @@
                           <a:ea typeface="Yu Gothic" pitchFamily="34" charset="-122"/>
                           <a:cs typeface="Yu Gothic" pitchFamily="34" charset="-120"/>
                         </a:rPr>
-                        <a:t>1,649万円</a:t>
+                        <a:t>1,299万円</a:t>
+                      </a:r>
+                      <a:endParaRPr lang="en-US" sz="900" dirty="0">
+                        <a:latin typeface="Yu Gothic" charset="0"/>
+                        <a:ea typeface="Yu Gothic" charset="0"/>
+                        <a:cs typeface="Yu Gothic" charset="0"/>
+                      </a:endParaRPr>
+                    </a:p>
+                  </a:txBody>
+                  <a:tcPr marL="45720" marR="45720" marT="45720" marB="45720" anchor="ctr">
+                    <a:lnL w="7620" cap="flat" cmpd="sng" algn="ctr">
+                      <a:solidFill>
+                        <a:srgbClr val="2E2A24"/>
+                      </a:solidFill>
+                      <a:prstDash val="solid"/>
+                      <a:round/>
+                      <a:headEnd type="none" w="med" len="med"/>
+                      <a:tailEnd type="none" w="med" len="med"/>
+                    </a:lnL>
+                    <a:lnR w="7620" cap="flat" cmpd="sng" algn="ctr">
+                      <a:solidFill>
+                        <a:srgbClr val="2E2A24"/>
+                      </a:solidFill>
+                      <a:prstDash val="solid"/>
+                      <a:round/>
+                      <a:headEnd type="none" w="med" len="med"/>
+                      <a:tailEnd type="none" w="med" len="med"/>
+                    </a:lnR>
+                    <a:lnT w="7620" cap="flat" cmpd="sng" algn="ctr">
+                      <a:solidFill>
+                        <a:srgbClr val="2E2A24"/>
+                      </a:solidFill>
+                      <a:prstDash val="solid"/>
+                      <a:round/>
+                      <a:headEnd type="none" w="med" len="med"/>
+                      <a:tailEnd type="none" w="med" len="med"/>
+                    </a:lnT>
+                    <a:lnB w="7620" cap="flat" cmpd="sng" algn="ctr">
+                      <a:solidFill>
+                        <a:srgbClr val="2E2A24"/>
+                      </a:solidFill>
+                      <a:prstDash val="solid"/>
+                      <a:round/>
+                      <a:headEnd type="none" w="med" len="med"/>
+                      <a:tailEnd type="none" w="med" len="med"/>
+                    </a:lnB>
+                    <a:solidFill>
+                      <a:srgbClr val="171614"/>
+                    </a:solidFill>
+                  </a:tcPr>
+                </a:tc>
+                <a:tc>
+                  <a:txBody>
+                    <a:bodyPr/>
+                    <a:lstStyle/>
+                    <a:p>
+                      <a:pPr algn="ctr" indent="0" marL="0">
+                        <a:buNone/>
+                      </a:pPr>
+                      <a:r>
+                        <a:rPr lang="en-US" sz="900" b="1" dirty="0">
+                          <a:solidFill>
+                            <a:srgbClr val="EFEBE3"/>
+                          </a:solidFill>
+                          <a:latin typeface="Yu Gothic" pitchFamily="34" charset="0"/>
+                          <a:ea typeface="Yu Gothic" pitchFamily="34" charset="-122"/>
+                          <a:cs typeface="Yu Gothic" pitchFamily="34" charset="-120"/>
+                        </a:rPr>
+                        <a:t>370万円</a:t>
                       </a:r>
                       <a:endParaRPr lang="en-US" sz="900" dirty="0">
                         <a:latin typeface="Yu Gothic" charset="0"/>
@@ -11499,7 +11567,7 @@
                           <a:ea typeface="Yu Gothic" pitchFamily="34" charset="-122"/>
                           <a:cs typeface="Yu Gothic" pitchFamily="34" charset="-120"/>
                         </a:rPr>
-                        <a:t>720万円</a:t>
+                        <a:t>638万円</a:t>
                       </a:r>
                       <a:endParaRPr lang="en-US" sz="900" dirty="0">
                         <a:latin typeface="Yu Gothic" charset="0"/>
@@ -11561,81 +11629,13 @@
                       <a:r>
                         <a:rPr lang="en-US" sz="900" b="1" dirty="0">
                           <a:solidFill>
-                            <a:srgbClr val="C9A96E"/>
+                            <a:srgbClr val="B4553F"/>
                           </a:solidFill>
                           <a:latin typeface="Yu Gothic" pitchFamily="34" charset="0"/>
                           <a:ea typeface="Yu Gothic" pitchFamily="34" charset="-122"/>
                           <a:cs typeface="Yu Gothic" pitchFamily="34" charset="-120"/>
                         </a:rPr>
-                        <a:t>988万円</a:t>
-                      </a:r>
-                      <a:endParaRPr lang="en-US" sz="900" dirty="0">
-                        <a:latin typeface="Yu Gothic" charset="0"/>
-                        <a:ea typeface="Yu Gothic" charset="0"/>
-                        <a:cs typeface="Yu Gothic" charset="0"/>
-                      </a:endParaRPr>
-                    </a:p>
-                  </a:txBody>
-                  <a:tcPr marL="45720" marR="45720" marT="45720" marB="45720" anchor="ctr">
-                    <a:lnL w="7620" cap="flat" cmpd="sng" algn="ctr">
-                      <a:solidFill>
-                        <a:srgbClr val="2E2A24"/>
-                      </a:solidFill>
-                      <a:prstDash val="solid"/>
-                      <a:round/>
-                      <a:headEnd type="none" w="med" len="med"/>
-                      <a:tailEnd type="none" w="med" len="med"/>
-                    </a:lnL>
-                    <a:lnR w="7620" cap="flat" cmpd="sng" algn="ctr">
-                      <a:solidFill>
-                        <a:srgbClr val="2E2A24"/>
-                      </a:solidFill>
-                      <a:prstDash val="solid"/>
-                      <a:round/>
-                      <a:headEnd type="none" w="med" len="med"/>
-                      <a:tailEnd type="none" w="med" len="med"/>
-                    </a:lnR>
-                    <a:lnT w="7620" cap="flat" cmpd="sng" algn="ctr">
-                      <a:solidFill>
-                        <a:srgbClr val="2E2A24"/>
-                      </a:solidFill>
-                      <a:prstDash val="solid"/>
-                      <a:round/>
-                      <a:headEnd type="none" w="med" len="med"/>
-                      <a:tailEnd type="none" w="med" len="med"/>
-                    </a:lnT>
-                    <a:lnB w="7620" cap="flat" cmpd="sng" algn="ctr">
-                      <a:solidFill>
-                        <a:srgbClr val="2E2A24"/>
-                      </a:solidFill>
-                      <a:prstDash val="solid"/>
-                      <a:round/>
-                      <a:headEnd type="none" w="med" len="med"/>
-                      <a:tailEnd type="none" w="med" len="med"/>
-                    </a:lnB>
-                    <a:solidFill>
-                      <a:srgbClr val="171614"/>
-                    </a:solidFill>
-                  </a:tcPr>
-                </a:tc>
-                <a:tc>
-                  <a:txBody>
-                    <a:bodyPr/>
-                    <a:lstStyle/>
-                    <a:p>
-                      <a:pPr algn="ctr" indent="0" marL="0">
-                        <a:buNone/>
-                      </a:pPr>
-                      <a:r>
-                        <a:rPr lang="en-US" sz="900" b="1" dirty="0">
-                          <a:solidFill>
-                            <a:srgbClr val="EFEBE3"/>
-                          </a:solidFill>
-                          <a:latin typeface="Yu Gothic" pitchFamily="34" charset="0"/>
-                          <a:ea typeface="Yu Gothic" pitchFamily="34" charset="-122"/>
-                          <a:cs typeface="Yu Gothic" pitchFamily="34" charset="-120"/>
-                        </a:rPr>
-                        <a:t>106万円</a:t>
+                        <a:t>▲244万円</a:t>
                       </a:r>
                       <a:endParaRPr lang="en-US" sz="900" dirty="0">
                         <a:latin typeface="Yu Gothic" charset="0"/>
@@ -11793,7 +11793,7 @@
                 <a:ea typeface="Yu Gothic" pitchFamily="34" charset="-122"/>
                 <a:cs typeface="Yu Gothic" pitchFamily="34" charset="-120"/>
               </a:rPr>
-              <a:t>ワイン市況が横ばいにとどまっても、値引き販売が必要になっても、貴社への精算額は簿価＋所定率のまま変わらない。ただし売れ行きが2年目に大きくずれ込み、かつ価格が下振れした場合はWineBank側が赤字となる。この点は25%案のほうが耐性が高く、両案をご検討いただきたい。</a:t>
+              <a:t>ワイン市況が横ばいにとどまっても、値引き販売が必要になっても、貴社への精算額は簿価＋所定率のまま変わらない。本案では売れ行きが2年目にずれ込んでもWineBank側は黒字を確保できるが、2年目の上乗せを厚くした対比案では下振れ時に赤字となる。事業の継続性という観点からは本案のほうが安定している。</a:t>
             </a:r>
             <a:endParaRPr lang="en-US" sz="900" dirty="0"/>
           </a:p>
@@ -12086,7 +12086,7 @@
                 <a:ea typeface="Yu Gothic" pitchFamily="34" charset="-122"/>
                 <a:cs typeface="Yu Gothic" pitchFamily="34" charset="-120"/>
               </a:rPr>
-              <a:t>WineBankが引き取る（ご提案）</a:t>
+              <a:t>WineBankが引き取る</a:t>
             </a:r>
             <a:endParaRPr lang="en-US" sz="1300" dirty="0"/>
           </a:p>
@@ -12128,7 +12128,7 @@
                 <a:ea typeface="Yu Gothic" pitchFamily="34" charset="-122"/>
                 <a:cs typeface="Yu Gothic" pitchFamily="34" charset="-120"/>
               </a:rPr>
-              <a:t>24ヶ月時点で残っている在庫を、WineBankが簿価＋30%で引き取る。これにより、貴社は売れ残りリスクを負わず、想定IRRが確定する。</a:t>
+              <a:t>24ヶ月時点で残っている在庫を、WineBankが簿価＋30%、もしくはその時点での市況を踏まえた協議により引き取る。これにより、貴社は売れ残りリスクを負わない。</a:t>
             </a:r>
             <a:endParaRPr lang="en-US" sz="1000" dirty="0"/>
           </a:p>
@@ -12157,10 +12157,9 @@
             <a:tbl>
               <a:tblPr/>
               <a:tblGrid>
-                <a:gridCol w="1188720"/>
-                <a:gridCol w="1188720"/>
+                <a:gridCol w="1591056"/>
                 <a:gridCol w="1463040"/>
-                <a:gridCol w="950976"/>
+                <a:gridCol w="1737360"/>
               </a:tblGrid>
               <a:tr h="274320">
                 <a:tc>
@@ -12180,7 +12179,7 @@
                           <a:ea typeface="Yu Gothic" pitchFamily="34" charset="-122"/>
                           <a:cs typeface="Yu Gothic" pitchFamily="34" charset="-120"/>
                         </a:rPr>
-                        <a:t>残存比率</a:t>
+                        <a:t>24ヶ月時点の残存</a:t>
                       </a:r>
                       <a:endParaRPr lang="en-US" sz="950" dirty="0">
                         <a:latin typeface="Yu Gothic" charset="0"/>
@@ -12317,74 +12316,6 @@
                           <a:cs typeface="Yu Gothic" pitchFamily="34" charset="-120"/>
                         </a:rPr>
                         <a:t>＋30%での引き取り額</a:t>
-                      </a:r>
-                      <a:endParaRPr lang="en-US" sz="950" dirty="0">
-                        <a:latin typeface="Yu Gothic" charset="0"/>
-                        <a:ea typeface="Yu Gothic" charset="0"/>
-                        <a:cs typeface="Yu Gothic" charset="0"/>
-                      </a:endParaRPr>
-                    </a:p>
-                  </a:txBody>
-                  <a:tcPr marL="45720" marR="45720" marT="45720" marB="45720" anchor="ctr">
-                    <a:lnL w="7620" cap="flat" cmpd="sng" algn="ctr">
-                      <a:solidFill>
-                        <a:srgbClr val="2E2A24"/>
-                      </a:solidFill>
-                      <a:prstDash val="solid"/>
-                      <a:round/>
-                      <a:headEnd type="none" w="med" len="med"/>
-                      <a:tailEnd type="none" w="med" len="med"/>
-                    </a:lnL>
-                    <a:lnR w="7620" cap="flat" cmpd="sng" algn="ctr">
-                      <a:solidFill>
-                        <a:srgbClr val="2E2A24"/>
-                      </a:solidFill>
-                      <a:prstDash val="solid"/>
-                      <a:round/>
-                      <a:headEnd type="none" w="med" len="med"/>
-                      <a:tailEnd type="none" w="med" len="med"/>
-                    </a:lnR>
-                    <a:lnT w="7620" cap="flat" cmpd="sng" algn="ctr">
-                      <a:solidFill>
-                        <a:srgbClr val="2E2A24"/>
-                      </a:solidFill>
-                      <a:prstDash val="solid"/>
-                      <a:round/>
-                      <a:headEnd type="none" w="med" len="med"/>
-                      <a:tailEnd type="none" w="med" len="med"/>
-                    </a:lnT>
-                    <a:lnB w="7620" cap="flat" cmpd="sng" algn="ctr">
-                      <a:solidFill>
-                        <a:srgbClr val="2E2A24"/>
-                      </a:solidFill>
-                      <a:prstDash val="solid"/>
-                      <a:round/>
-                      <a:headEnd type="none" w="med" len="med"/>
-                      <a:tailEnd type="none" w="med" len="med"/>
-                    </a:lnB>
-                    <a:solidFill>
-                      <a:srgbClr val="231F1A"/>
-                    </a:solidFill>
-                  </a:tcPr>
-                </a:tc>
-                <a:tc>
-                  <a:txBody>
-                    <a:bodyPr/>
-                    <a:lstStyle/>
-                    <a:p>
-                      <a:pPr algn="ctr" indent="0" marL="0">
-                        <a:buNone/>
-                      </a:pPr>
-                      <a:r>
-                        <a:rPr lang="en-US" sz="950" b="1" dirty="0">
-                          <a:solidFill>
-                            <a:srgbClr val="C9A96E"/>
-                          </a:solidFill>
-                          <a:latin typeface="Yu Gothic" pitchFamily="34" charset="0"/>
-                          <a:ea typeface="Yu Gothic" pitchFamily="34" charset="-122"/>
-                          <a:cs typeface="Yu Gothic" pitchFamily="34" charset="-120"/>
-                        </a:rPr>
-                        <a:t>＋25%の場合</a:t>
                       </a:r>
                       <a:endParaRPr lang="en-US" sz="950" dirty="0">
                         <a:latin typeface="Yu Gothic" charset="0"/>
@@ -12641,74 +12572,6 @@
                     </a:solidFill>
                   </a:tcPr>
                 </a:tc>
-                <a:tc>
-                  <a:txBody>
-                    <a:bodyPr/>
-                    <a:lstStyle/>
-                    <a:p>
-                      <a:pPr algn="ctr" indent="0" marL="0">
-                        <a:buNone/>
-                      </a:pPr>
-                      <a:r>
-                        <a:rPr lang="en-US" sz="900" dirty="0">
-                          <a:solidFill>
-                            <a:srgbClr val="EFEBE3"/>
-                          </a:solidFill>
-                          <a:latin typeface="Yu Gothic" pitchFamily="34" charset="0"/>
-                          <a:ea typeface="Yu Gothic" pitchFamily="34" charset="-122"/>
-                          <a:cs typeface="Yu Gothic" pitchFamily="34" charset="-120"/>
-                        </a:rPr>
-                        <a:t>625万円</a:t>
-                      </a:r>
-                      <a:endParaRPr lang="en-US" sz="900" dirty="0">
-                        <a:latin typeface="Yu Gothic" charset="0"/>
-                        <a:ea typeface="Yu Gothic" charset="0"/>
-                        <a:cs typeface="Yu Gothic" charset="0"/>
-                      </a:endParaRPr>
-                    </a:p>
-                  </a:txBody>
-                  <a:tcPr marL="45720" marR="45720" marT="45720" marB="45720" anchor="ctr">
-                    <a:lnL w="7620" cap="flat" cmpd="sng" algn="ctr">
-                      <a:solidFill>
-                        <a:srgbClr val="2E2A24"/>
-                      </a:solidFill>
-                      <a:prstDash val="solid"/>
-                      <a:round/>
-                      <a:headEnd type="none" w="med" len="med"/>
-                      <a:tailEnd type="none" w="med" len="med"/>
-                    </a:lnL>
-                    <a:lnR w="7620" cap="flat" cmpd="sng" algn="ctr">
-                      <a:solidFill>
-                        <a:srgbClr val="2E2A24"/>
-                      </a:solidFill>
-                      <a:prstDash val="solid"/>
-                      <a:round/>
-                      <a:headEnd type="none" w="med" len="med"/>
-                      <a:tailEnd type="none" w="med" len="med"/>
-                    </a:lnR>
-                    <a:lnT w="7620" cap="flat" cmpd="sng" algn="ctr">
-                      <a:solidFill>
-                        <a:srgbClr val="2E2A24"/>
-                      </a:solidFill>
-                      <a:prstDash val="solid"/>
-                      <a:round/>
-                      <a:headEnd type="none" w="med" len="med"/>
-                      <a:tailEnd type="none" w="med" len="med"/>
-                    </a:lnT>
-                    <a:lnB w="7620" cap="flat" cmpd="sng" algn="ctr">
-                      <a:solidFill>
-                        <a:srgbClr val="2E2A24"/>
-                      </a:solidFill>
-                      <a:prstDash val="solid"/>
-                      <a:round/>
-                      <a:headEnd type="none" w="med" len="med"/>
-                      <a:tailEnd type="none" w="med" len="med"/>
-                    </a:lnB>
-                    <a:solidFill>
-                      <a:srgbClr val="171614"/>
-                    </a:solidFill>
-                  </a:tcPr>
-                </a:tc>
               </a:tr>
               <a:tr h="274320">
                 <a:tc>
@@ -12865,74 +12728,6 @@
                           <a:cs typeface="Yu Gothic" pitchFamily="34" charset="-120"/>
                         </a:rPr>
                         <a:t>1,300万円</a:t>
-                      </a:r>
-                      <a:endParaRPr lang="en-US" sz="900" dirty="0">
-                        <a:latin typeface="Yu Gothic" charset="0"/>
-                        <a:ea typeface="Yu Gothic" charset="0"/>
-                        <a:cs typeface="Yu Gothic" charset="0"/>
-                      </a:endParaRPr>
-                    </a:p>
-                  </a:txBody>
-                  <a:tcPr marL="45720" marR="45720" marT="45720" marB="45720" anchor="ctr">
-                    <a:lnL w="7620" cap="flat" cmpd="sng" algn="ctr">
-                      <a:solidFill>
-                        <a:srgbClr val="2E2A24"/>
-                      </a:solidFill>
-                      <a:prstDash val="solid"/>
-                      <a:round/>
-                      <a:headEnd type="none" w="med" len="med"/>
-                      <a:tailEnd type="none" w="med" len="med"/>
-                    </a:lnL>
-                    <a:lnR w="7620" cap="flat" cmpd="sng" algn="ctr">
-                      <a:solidFill>
-                        <a:srgbClr val="2E2A24"/>
-                      </a:solidFill>
-                      <a:prstDash val="solid"/>
-                      <a:round/>
-                      <a:headEnd type="none" w="med" len="med"/>
-                      <a:tailEnd type="none" w="med" len="med"/>
-                    </a:lnR>
-                    <a:lnT w="7620" cap="flat" cmpd="sng" algn="ctr">
-                      <a:solidFill>
-                        <a:srgbClr val="2E2A24"/>
-                      </a:solidFill>
-                      <a:prstDash val="solid"/>
-                      <a:round/>
-                      <a:headEnd type="none" w="med" len="med"/>
-                      <a:tailEnd type="none" w="med" len="med"/>
-                    </a:lnT>
-                    <a:lnB w="7620" cap="flat" cmpd="sng" algn="ctr">
-                      <a:solidFill>
-                        <a:srgbClr val="2E2A24"/>
-                      </a:solidFill>
-                      <a:prstDash val="solid"/>
-                      <a:round/>
-                      <a:headEnd type="none" w="med" len="med"/>
-                      <a:tailEnd type="none" w="med" len="med"/>
-                    </a:lnB>
-                    <a:solidFill>
-                      <a:srgbClr val="171614"/>
-                    </a:solidFill>
-                  </a:tcPr>
-                </a:tc>
-                <a:tc>
-                  <a:txBody>
-                    <a:bodyPr/>
-                    <a:lstStyle/>
-                    <a:p>
-                      <a:pPr algn="ctr" indent="0" marL="0">
-                        <a:buNone/>
-                      </a:pPr>
-                      <a:r>
-                        <a:rPr lang="en-US" sz="900" dirty="0">
-                          <a:solidFill>
-                            <a:srgbClr val="EFEBE3"/>
-                          </a:solidFill>
-                          <a:latin typeface="Yu Gothic" pitchFamily="34" charset="0"/>
-                          <a:ea typeface="Yu Gothic" pitchFamily="34" charset="-122"/>
-                          <a:cs typeface="Yu Gothic" pitchFamily="34" charset="-120"/>
-                        </a:rPr>
-                        <a:t>1,250万円</a:t>
                       </a:r>
                       <a:endParaRPr lang="en-US" sz="900" dirty="0">
                         <a:latin typeface="Yu Gothic" charset="0"/>
@@ -13189,74 +12984,6 @@
                     </a:solidFill>
                   </a:tcPr>
                 </a:tc>
-                <a:tc>
-                  <a:txBody>
-                    <a:bodyPr/>
-                    <a:lstStyle/>
-                    <a:p>
-                      <a:pPr algn="ctr" indent="0" marL="0">
-                        <a:buNone/>
-                      </a:pPr>
-                      <a:r>
-                        <a:rPr lang="en-US" sz="900" dirty="0">
-                          <a:solidFill>
-                            <a:srgbClr val="EFEBE3"/>
-                          </a:solidFill>
-                          <a:latin typeface="Yu Gothic" pitchFamily="34" charset="0"/>
-                          <a:ea typeface="Yu Gothic" pitchFamily="34" charset="-122"/>
-                          <a:cs typeface="Yu Gothic" pitchFamily="34" charset="-120"/>
-                        </a:rPr>
-                        <a:t>2,500万円</a:t>
-                      </a:r>
-                      <a:endParaRPr lang="en-US" sz="900" dirty="0">
-                        <a:latin typeface="Yu Gothic" charset="0"/>
-                        <a:ea typeface="Yu Gothic" charset="0"/>
-                        <a:cs typeface="Yu Gothic" charset="0"/>
-                      </a:endParaRPr>
-                    </a:p>
-                  </a:txBody>
-                  <a:tcPr marL="45720" marR="45720" marT="45720" marB="45720" anchor="ctr">
-                    <a:lnL w="7620" cap="flat" cmpd="sng" algn="ctr">
-                      <a:solidFill>
-                        <a:srgbClr val="2E2A24"/>
-                      </a:solidFill>
-                      <a:prstDash val="solid"/>
-                      <a:round/>
-                      <a:headEnd type="none" w="med" len="med"/>
-                      <a:tailEnd type="none" w="med" len="med"/>
-                    </a:lnL>
-                    <a:lnR w="7620" cap="flat" cmpd="sng" algn="ctr">
-                      <a:solidFill>
-                        <a:srgbClr val="2E2A24"/>
-                      </a:solidFill>
-                      <a:prstDash val="solid"/>
-                      <a:round/>
-                      <a:headEnd type="none" w="med" len="med"/>
-                      <a:tailEnd type="none" w="med" len="med"/>
-                    </a:lnR>
-                    <a:lnT w="7620" cap="flat" cmpd="sng" algn="ctr">
-                      <a:solidFill>
-                        <a:srgbClr val="2E2A24"/>
-                      </a:solidFill>
-                      <a:prstDash val="solid"/>
-                      <a:round/>
-                      <a:headEnd type="none" w="med" len="med"/>
-                      <a:tailEnd type="none" w="med" len="med"/>
-                    </a:lnT>
-                    <a:lnB w="7620" cap="flat" cmpd="sng" algn="ctr">
-                      <a:solidFill>
-                        <a:srgbClr val="2E2A24"/>
-                      </a:solidFill>
-                      <a:prstDash val="solid"/>
-                      <a:round/>
-                      <a:headEnd type="none" w="med" len="med"/>
-                      <a:tailEnd type="none" w="med" len="med"/>
-                    </a:lnB>
-                    <a:solidFill>
-                      <a:srgbClr val="171614"/>
-                    </a:solidFill>
-                  </a:tcPr>
-                </a:tc>
               </a:tr>
             </a:tbl>
           </a:graphicData>
@@ -13385,7 +13112,7 @@
           </p:nvPr>
         </p:nvGraphicFramePr>
         <p:xfrm>
-          <a:off x="6489040" y="2542032"/>
+          <a:off x="6489040" y="2651760"/>
           <a:ext cx="4788256" cy="914400"/>
         </p:xfrm>
         <a:graphic>
@@ -13399,7 +13126,7 @@
                 <a:gridCol w="1188720"/>
                 <a:gridCol w="676656"/>
               </a:tblGrid>
-              <a:tr h="237744">
+              <a:tr h="292608">
                 <a:tc>
                   <a:txBody>
                     <a:bodyPr/>
@@ -13741,7 +13468,7 @@
                   </a:tcPr>
                 </a:tc>
               </a:tr>
-              <a:tr h="237744">
+              <a:tr h="292608">
                 <a:tc>
                   <a:txBody>
                     <a:bodyPr/>
@@ -14083,7 +13810,7 @@
                   </a:tcPr>
                 </a:tc>
               </a:tr>
-              <a:tr h="237744">
+              <a:tr h="292608">
                 <a:tc>
                   <a:txBody>
                     <a:bodyPr/>
@@ -14425,690 +14152,6 @@
                   </a:tcPr>
                 </a:tc>
               </a:tr>
-              <a:tr h="237744">
-                <a:tc>
-                  <a:txBody>
-                    <a:bodyPr/>
-                    <a:lstStyle/>
-                    <a:p>
-                      <a:pPr algn="ctr" indent="0" marL="0">
-                        <a:buNone/>
-                      </a:pPr>
-                      <a:r>
-                        <a:rPr lang="en-US" sz="850" dirty="0">
-                          <a:solidFill>
-                            <a:srgbClr val="EFEBE3"/>
-                          </a:solidFill>
-                          <a:latin typeface="Yu Gothic" pitchFamily="34" charset="0"/>
-                          <a:ea typeface="Yu Gothic" pitchFamily="34" charset="-122"/>
-                          <a:cs typeface="Yu Gothic" pitchFamily="34" charset="-120"/>
-                        </a:rPr>
-                        <a:t>＋25%</a:t>
-                      </a:r>
-                      <a:endParaRPr lang="en-US" sz="850" dirty="0">
-                        <a:latin typeface="Yu Gothic" charset="0"/>
-                        <a:ea typeface="Yu Gothic" charset="0"/>
-                        <a:cs typeface="Yu Gothic" charset="0"/>
-                      </a:endParaRPr>
-                    </a:p>
-                  </a:txBody>
-                  <a:tcPr marL="45720" marR="45720" marT="45720" marB="45720" anchor="ctr">
-                    <a:lnL w="7620" cap="flat" cmpd="sng" algn="ctr">
-                      <a:solidFill>
-                        <a:srgbClr val="2E2A24"/>
-                      </a:solidFill>
-                      <a:prstDash val="solid"/>
-                      <a:round/>
-                      <a:headEnd type="none" w="med" len="med"/>
-                      <a:tailEnd type="none" w="med" len="med"/>
-                    </a:lnL>
-                    <a:lnR w="7620" cap="flat" cmpd="sng" algn="ctr">
-                      <a:solidFill>
-                        <a:srgbClr val="2E2A24"/>
-                      </a:solidFill>
-                      <a:prstDash val="solid"/>
-                      <a:round/>
-                      <a:headEnd type="none" w="med" len="med"/>
-                      <a:tailEnd type="none" w="med" len="med"/>
-                    </a:lnR>
-                    <a:lnT w="7620" cap="flat" cmpd="sng" algn="ctr">
-                      <a:solidFill>
-                        <a:srgbClr val="2E2A24"/>
-                      </a:solidFill>
-                      <a:prstDash val="solid"/>
-                      <a:round/>
-                      <a:headEnd type="none" w="med" len="med"/>
-                      <a:tailEnd type="none" w="med" len="med"/>
-                    </a:lnT>
-                    <a:lnB w="7620" cap="flat" cmpd="sng" algn="ctr">
-                      <a:solidFill>
-                        <a:srgbClr val="2E2A24"/>
-                      </a:solidFill>
-                      <a:prstDash val="solid"/>
-                      <a:round/>
-                      <a:headEnd type="none" w="med" len="med"/>
-                      <a:tailEnd type="none" w="med" len="med"/>
-                    </a:lnB>
-                    <a:solidFill>
-                      <a:srgbClr val="171614"/>
-                    </a:solidFill>
-                  </a:tcPr>
-                </a:tc>
-                <a:tc>
-                  <a:txBody>
-                    <a:bodyPr/>
-                    <a:lstStyle/>
-                    <a:p>
-                      <a:pPr algn="ctr" indent="0" marL="0">
-                        <a:buNone/>
-                      </a:pPr>
-                      <a:r>
-                        <a:rPr lang="en-US" sz="850" dirty="0">
-                          <a:solidFill>
-                            <a:srgbClr val="EFEBE3"/>
-                          </a:solidFill>
-                          <a:latin typeface="Yu Gothic" pitchFamily="34" charset="0"/>
-                          <a:ea typeface="Yu Gothic" pitchFamily="34" charset="-122"/>
-                          <a:cs typeface="Yu Gothic" pitchFamily="34" charset="-120"/>
-                        </a:rPr>
-                        <a:t>上昇6%</a:t>
-                      </a:r>
-                      <a:endParaRPr lang="en-US" sz="850" dirty="0">
-                        <a:latin typeface="Yu Gothic" charset="0"/>
-                        <a:ea typeface="Yu Gothic" charset="0"/>
-                        <a:cs typeface="Yu Gothic" charset="0"/>
-                      </a:endParaRPr>
-                    </a:p>
-                  </a:txBody>
-                  <a:tcPr marL="45720" marR="45720" marT="45720" marB="45720" anchor="ctr">
-                    <a:lnL w="7620" cap="flat" cmpd="sng" algn="ctr">
-                      <a:solidFill>
-                        <a:srgbClr val="2E2A24"/>
-                      </a:solidFill>
-                      <a:prstDash val="solid"/>
-                      <a:round/>
-                      <a:headEnd type="none" w="med" len="med"/>
-                      <a:tailEnd type="none" w="med" len="med"/>
-                    </a:lnL>
-                    <a:lnR w="7620" cap="flat" cmpd="sng" algn="ctr">
-                      <a:solidFill>
-                        <a:srgbClr val="2E2A24"/>
-                      </a:solidFill>
-                      <a:prstDash val="solid"/>
-                      <a:round/>
-                      <a:headEnd type="none" w="med" len="med"/>
-                      <a:tailEnd type="none" w="med" len="med"/>
-                    </a:lnR>
-                    <a:lnT w="7620" cap="flat" cmpd="sng" algn="ctr">
-                      <a:solidFill>
-                        <a:srgbClr val="2E2A24"/>
-                      </a:solidFill>
-                      <a:prstDash val="solid"/>
-                      <a:round/>
-                      <a:headEnd type="none" w="med" len="med"/>
-                      <a:tailEnd type="none" w="med" len="med"/>
-                    </a:lnT>
-                    <a:lnB w="7620" cap="flat" cmpd="sng" algn="ctr">
-                      <a:solidFill>
-                        <a:srgbClr val="2E2A24"/>
-                      </a:solidFill>
-                      <a:prstDash val="solid"/>
-                      <a:round/>
-                      <a:headEnd type="none" w="med" len="med"/>
-                      <a:tailEnd type="none" w="med" len="med"/>
-                    </a:lnB>
-                    <a:solidFill>
-                      <a:srgbClr val="171614"/>
-                    </a:solidFill>
-                  </a:tcPr>
-                </a:tc>
-                <a:tc>
-                  <a:txBody>
-                    <a:bodyPr/>
-                    <a:lstStyle/>
-                    <a:p>
-                      <a:pPr algn="ctr" indent="0" marL="0">
-                        <a:buNone/>
-                      </a:pPr>
-                      <a:r>
-                        <a:rPr lang="en-US" sz="850" dirty="0">
-                          <a:solidFill>
-                            <a:srgbClr val="EFEBE3"/>
-                          </a:solidFill>
-                          <a:latin typeface="Yu Gothic" pitchFamily="34" charset="0"/>
-                          <a:ea typeface="Yu Gothic" pitchFamily="34" charset="-122"/>
-                          <a:cs typeface="Yu Gothic" pitchFamily="34" charset="-120"/>
-                        </a:rPr>
-                        <a:t>65.63</a:t>
-                      </a:r>
-                      <a:endParaRPr lang="en-US" sz="850" dirty="0">
-                        <a:latin typeface="Yu Gothic" charset="0"/>
-                        <a:ea typeface="Yu Gothic" charset="0"/>
-                        <a:cs typeface="Yu Gothic" charset="0"/>
-                      </a:endParaRPr>
-                    </a:p>
-                  </a:txBody>
-                  <a:tcPr marL="45720" marR="45720" marT="45720" marB="45720" anchor="ctr">
-                    <a:lnL w="7620" cap="flat" cmpd="sng" algn="ctr">
-                      <a:solidFill>
-                        <a:srgbClr val="2E2A24"/>
-                      </a:solidFill>
-                      <a:prstDash val="solid"/>
-                      <a:round/>
-                      <a:headEnd type="none" w="med" len="med"/>
-                      <a:tailEnd type="none" w="med" len="med"/>
-                    </a:lnL>
-                    <a:lnR w="7620" cap="flat" cmpd="sng" algn="ctr">
-                      <a:solidFill>
-                        <a:srgbClr val="2E2A24"/>
-                      </a:solidFill>
-                      <a:prstDash val="solid"/>
-                      <a:round/>
-                      <a:headEnd type="none" w="med" len="med"/>
-                      <a:tailEnd type="none" w="med" len="med"/>
-                    </a:lnR>
-                    <a:lnT w="7620" cap="flat" cmpd="sng" algn="ctr">
-                      <a:solidFill>
-                        <a:srgbClr val="2E2A24"/>
-                      </a:solidFill>
-                      <a:prstDash val="solid"/>
-                      <a:round/>
-                      <a:headEnd type="none" w="med" len="med"/>
-                      <a:tailEnd type="none" w="med" len="med"/>
-                    </a:lnT>
-                    <a:lnB w="7620" cap="flat" cmpd="sng" algn="ctr">
-                      <a:solidFill>
-                        <a:srgbClr val="2E2A24"/>
-                      </a:solidFill>
-                      <a:prstDash val="solid"/>
-                      <a:round/>
-                      <a:headEnd type="none" w="med" len="med"/>
-                      <a:tailEnd type="none" w="med" len="med"/>
-                    </a:lnB>
-                    <a:solidFill>
-                      <a:srgbClr val="171614"/>
-                    </a:solidFill>
-                  </a:tcPr>
-                </a:tc>
-                <a:tc>
-                  <a:txBody>
-                    <a:bodyPr/>
-                    <a:lstStyle/>
-                    <a:p>
-                      <a:pPr algn="ctr" indent="0" marL="0">
-                        <a:buNone/>
-                      </a:pPr>
-                      <a:r>
-                        <a:rPr lang="en-US" sz="850" dirty="0">
-                          <a:solidFill>
-                            <a:srgbClr val="EFEBE3"/>
-                          </a:solidFill>
-                          <a:latin typeface="Yu Gothic" pitchFamily="34" charset="0"/>
-                          <a:ea typeface="Yu Gothic" pitchFamily="34" charset="-122"/>
-                          <a:cs typeface="Yu Gothic" pitchFamily="34" charset="-120"/>
-                        </a:rPr>
-                        <a:t>72.52</a:t>
-                      </a:r>
-                      <a:endParaRPr lang="en-US" sz="850" dirty="0">
-                        <a:latin typeface="Yu Gothic" charset="0"/>
-                        <a:ea typeface="Yu Gothic" charset="0"/>
-                        <a:cs typeface="Yu Gothic" charset="0"/>
-                      </a:endParaRPr>
-                    </a:p>
-                  </a:txBody>
-                  <a:tcPr marL="45720" marR="45720" marT="45720" marB="45720" anchor="ctr">
-                    <a:lnL w="7620" cap="flat" cmpd="sng" algn="ctr">
-                      <a:solidFill>
-                        <a:srgbClr val="2E2A24"/>
-                      </a:solidFill>
-                      <a:prstDash val="solid"/>
-                      <a:round/>
-                      <a:headEnd type="none" w="med" len="med"/>
-                      <a:tailEnd type="none" w="med" len="med"/>
-                    </a:lnL>
-                    <a:lnR w="7620" cap="flat" cmpd="sng" algn="ctr">
-                      <a:solidFill>
-                        <a:srgbClr val="2E2A24"/>
-                      </a:solidFill>
-                      <a:prstDash val="solid"/>
-                      <a:round/>
-                      <a:headEnd type="none" w="med" len="med"/>
-                      <a:tailEnd type="none" w="med" len="med"/>
-                    </a:lnR>
-                    <a:lnT w="7620" cap="flat" cmpd="sng" algn="ctr">
-                      <a:solidFill>
-                        <a:srgbClr val="2E2A24"/>
-                      </a:solidFill>
-                      <a:prstDash val="solid"/>
-                      <a:round/>
-                      <a:headEnd type="none" w="med" len="med"/>
-                      <a:tailEnd type="none" w="med" len="med"/>
-                    </a:lnT>
-                    <a:lnB w="7620" cap="flat" cmpd="sng" algn="ctr">
-                      <a:solidFill>
-                        <a:srgbClr val="2E2A24"/>
-                      </a:solidFill>
-                      <a:prstDash val="solid"/>
-                      <a:round/>
-                      <a:headEnd type="none" w="med" len="med"/>
-                      <a:tailEnd type="none" w="med" len="med"/>
-                    </a:lnB>
-                    <a:solidFill>
-                      <a:srgbClr val="171614"/>
-                    </a:solidFill>
-                  </a:tcPr>
-                </a:tc>
-                <a:tc>
-                  <a:txBody>
-                    <a:bodyPr/>
-                    <a:lstStyle/>
-                    <a:p>
-                      <a:pPr algn="ctr" indent="0" marL="0">
-                        <a:buNone/>
-                      </a:pPr>
-                      <a:r>
-                        <a:rPr lang="en-US" sz="850" b="1" dirty="0">
-                          <a:solidFill>
-                            <a:srgbClr val="C9A96E"/>
-                          </a:solidFill>
-                          <a:latin typeface="Yu Gothic" pitchFamily="34" charset="0"/>
-                          <a:ea typeface="Yu Gothic" pitchFamily="34" charset="-122"/>
-                          <a:cs typeface="Yu Gothic" pitchFamily="34" charset="-120"/>
-                        </a:rPr>
-                        <a:t>＋6.90</a:t>
-                      </a:r>
-                      <a:endParaRPr lang="en-US" sz="850" dirty="0">
-                        <a:latin typeface="Yu Gothic" charset="0"/>
-                        <a:ea typeface="Yu Gothic" charset="0"/>
-                        <a:cs typeface="Yu Gothic" charset="0"/>
-                      </a:endParaRPr>
-                    </a:p>
-                  </a:txBody>
-                  <a:tcPr marL="45720" marR="45720" marT="45720" marB="45720" anchor="ctr">
-                    <a:lnL w="7620" cap="flat" cmpd="sng" algn="ctr">
-                      <a:solidFill>
-                        <a:srgbClr val="2E2A24"/>
-                      </a:solidFill>
-                      <a:prstDash val="solid"/>
-                      <a:round/>
-                      <a:headEnd type="none" w="med" len="med"/>
-                      <a:tailEnd type="none" w="med" len="med"/>
-                    </a:lnL>
-                    <a:lnR w="7620" cap="flat" cmpd="sng" algn="ctr">
-                      <a:solidFill>
-                        <a:srgbClr val="2E2A24"/>
-                      </a:solidFill>
-                      <a:prstDash val="solid"/>
-                      <a:round/>
-                      <a:headEnd type="none" w="med" len="med"/>
-                      <a:tailEnd type="none" w="med" len="med"/>
-                    </a:lnR>
-                    <a:lnT w="7620" cap="flat" cmpd="sng" algn="ctr">
-                      <a:solidFill>
-                        <a:srgbClr val="2E2A24"/>
-                      </a:solidFill>
-                      <a:prstDash val="solid"/>
-                      <a:round/>
-                      <a:headEnd type="none" w="med" len="med"/>
-                      <a:tailEnd type="none" w="med" len="med"/>
-                    </a:lnT>
-                    <a:lnB w="7620" cap="flat" cmpd="sng" algn="ctr">
-                      <a:solidFill>
-                        <a:srgbClr val="2E2A24"/>
-                      </a:solidFill>
-                      <a:prstDash val="solid"/>
-                      <a:round/>
-                      <a:headEnd type="none" w="med" len="med"/>
-                      <a:tailEnd type="none" w="med" len="med"/>
-                    </a:lnB>
-                    <a:solidFill>
-                      <a:srgbClr val="171614"/>
-                    </a:solidFill>
-                  </a:tcPr>
-                </a:tc>
-              </a:tr>
-              <a:tr h="237744">
-                <a:tc>
-                  <a:txBody>
-                    <a:bodyPr/>
-                    <a:lstStyle/>
-                    <a:p>
-                      <a:pPr algn="ctr" indent="0" marL="0">
-                        <a:buNone/>
-                      </a:pPr>
-                      <a:r>
-                        <a:rPr lang="en-US" sz="850" dirty="0">
-                          <a:solidFill>
-                            <a:srgbClr val="EFEBE3"/>
-                          </a:solidFill>
-                          <a:latin typeface="Yu Gothic" pitchFamily="34" charset="0"/>
-                          <a:ea typeface="Yu Gothic" pitchFamily="34" charset="-122"/>
-                          <a:cs typeface="Yu Gothic" pitchFamily="34" charset="-120"/>
-                        </a:rPr>
-                        <a:t>＋25%</a:t>
-                      </a:r>
-                      <a:endParaRPr lang="en-US" sz="850" dirty="0">
-                        <a:latin typeface="Yu Gothic" charset="0"/>
-                        <a:ea typeface="Yu Gothic" charset="0"/>
-                        <a:cs typeface="Yu Gothic" charset="0"/>
-                      </a:endParaRPr>
-                    </a:p>
-                  </a:txBody>
-                  <a:tcPr marL="45720" marR="45720" marT="45720" marB="45720" anchor="ctr">
-                    <a:lnL w="7620" cap="flat" cmpd="sng" algn="ctr">
-                      <a:solidFill>
-                        <a:srgbClr val="2E2A24"/>
-                      </a:solidFill>
-                      <a:prstDash val="solid"/>
-                      <a:round/>
-                      <a:headEnd type="none" w="med" len="med"/>
-                      <a:tailEnd type="none" w="med" len="med"/>
-                    </a:lnL>
-                    <a:lnR w="7620" cap="flat" cmpd="sng" algn="ctr">
-                      <a:solidFill>
-                        <a:srgbClr val="2E2A24"/>
-                      </a:solidFill>
-                      <a:prstDash val="solid"/>
-                      <a:round/>
-                      <a:headEnd type="none" w="med" len="med"/>
-                      <a:tailEnd type="none" w="med" len="med"/>
-                    </a:lnR>
-                    <a:lnT w="7620" cap="flat" cmpd="sng" algn="ctr">
-                      <a:solidFill>
-                        <a:srgbClr val="2E2A24"/>
-                      </a:solidFill>
-                      <a:prstDash val="solid"/>
-                      <a:round/>
-                      <a:headEnd type="none" w="med" len="med"/>
-                      <a:tailEnd type="none" w="med" len="med"/>
-                    </a:lnT>
-                    <a:lnB w="7620" cap="flat" cmpd="sng" algn="ctr">
-                      <a:solidFill>
-                        <a:srgbClr val="2E2A24"/>
-                      </a:solidFill>
-                      <a:prstDash val="solid"/>
-                      <a:round/>
-                      <a:headEnd type="none" w="med" len="med"/>
-                      <a:tailEnd type="none" w="med" len="med"/>
-                    </a:lnB>
-                    <a:solidFill>
-                      <a:srgbClr val="171614"/>
-                    </a:solidFill>
-                  </a:tcPr>
-                </a:tc>
-                <a:tc>
-                  <a:txBody>
-                    <a:bodyPr/>
-                    <a:lstStyle/>
-                    <a:p>
-                      <a:pPr algn="ctr" indent="0" marL="0">
-                        <a:buNone/>
-                      </a:pPr>
-                      <a:r>
-                        <a:rPr lang="en-US" sz="850" dirty="0">
-                          <a:solidFill>
-                            <a:srgbClr val="EFEBE3"/>
-                          </a:solidFill>
-                          <a:latin typeface="Yu Gothic" pitchFamily="34" charset="0"/>
-                          <a:ea typeface="Yu Gothic" pitchFamily="34" charset="-122"/>
-                          <a:cs typeface="Yu Gothic" pitchFamily="34" charset="-120"/>
-                        </a:rPr>
-                        <a:t>上昇0%</a:t>
-                      </a:r>
-                      <a:endParaRPr lang="en-US" sz="850" dirty="0">
-                        <a:latin typeface="Yu Gothic" charset="0"/>
-                        <a:ea typeface="Yu Gothic" charset="0"/>
-                        <a:cs typeface="Yu Gothic" charset="0"/>
-                      </a:endParaRPr>
-                    </a:p>
-                  </a:txBody>
-                  <a:tcPr marL="45720" marR="45720" marT="45720" marB="45720" anchor="ctr">
-                    <a:lnL w="7620" cap="flat" cmpd="sng" algn="ctr">
-                      <a:solidFill>
-                        <a:srgbClr val="2E2A24"/>
-                      </a:solidFill>
-                      <a:prstDash val="solid"/>
-                      <a:round/>
-                      <a:headEnd type="none" w="med" len="med"/>
-                      <a:tailEnd type="none" w="med" len="med"/>
-                    </a:lnL>
-                    <a:lnR w="7620" cap="flat" cmpd="sng" algn="ctr">
-                      <a:solidFill>
-                        <a:srgbClr val="2E2A24"/>
-                      </a:solidFill>
-                      <a:prstDash val="solid"/>
-                      <a:round/>
-                      <a:headEnd type="none" w="med" len="med"/>
-                      <a:tailEnd type="none" w="med" len="med"/>
-                    </a:lnR>
-                    <a:lnT w="7620" cap="flat" cmpd="sng" algn="ctr">
-                      <a:solidFill>
-                        <a:srgbClr val="2E2A24"/>
-                      </a:solidFill>
-                      <a:prstDash val="solid"/>
-                      <a:round/>
-                      <a:headEnd type="none" w="med" len="med"/>
-                      <a:tailEnd type="none" w="med" len="med"/>
-                    </a:lnT>
-                    <a:lnB w="7620" cap="flat" cmpd="sng" algn="ctr">
-                      <a:solidFill>
-                        <a:srgbClr val="2E2A24"/>
-                      </a:solidFill>
-                      <a:prstDash val="solid"/>
-                      <a:round/>
-                      <a:headEnd type="none" w="med" len="med"/>
-                      <a:tailEnd type="none" w="med" len="med"/>
-                    </a:lnB>
-                    <a:solidFill>
-                      <a:srgbClr val="171614"/>
-                    </a:solidFill>
-                  </a:tcPr>
-                </a:tc>
-                <a:tc>
-                  <a:txBody>
-                    <a:bodyPr/>
-                    <a:lstStyle/>
-                    <a:p>
-                      <a:pPr algn="ctr" indent="0" marL="0">
-                        <a:buNone/>
-                      </a:pPr>
-                      <a:r>
-                        <a:rPr lang="en-US" sz="850" dirty="0">
-                          <a:solidFill>
-                            <a:srgbClr val="EFEBE3"/>
-                          </a:solidFill>
-                          <a:latin typeface="Yu Gothic" pitchFamily="34" charset="0"/>
-                          <a:ea typeface="Yu Gothic" pitchFamily="34" charset="-122"/>
-                          <a:cs typeface="Yu Gothic" pitchFamily="34" charset="-120"/>
-                        </a:rPr>
-                        <a:t>65.63</a:t>
-                      </a:r>
-                      <a:endParaRPr lang="en-US" sz="850" dirty="0">
-                        <a:latin typeface="Yu Gothic" charset="0"/>
-                        <a:ea typeface="Yu Gothic" charset="0"/>
-                        <a:cs typeface="Yu Gothic" charset="0"/>
-                      </a:endParaRPr>
-                    </a:p>
-                  </a:txBody>
-                  <a:tcPr marL="45720" marR="45720" marT="45720" marB="45720" anchor="ctr">
-                    <a:lnL w="7620" cap="flat" cmpd="sng" algn="ctr">
-                      <a:solidFill>
-                        <a:srgbClr val="2E2A24"/>
-                      </a:solidFill>
-                      <a:prstDash val="solid"/>
-                      <a:round/>
-                      <a:headEnd type="none" w="med" len="med"/>
-                      <a:tailEnd type="none" w="med" len="med"/>
-                    </a:lnL>
-                    <a:lnR w="7620" cap="flat" cmpd="sng" algn="ctr">
-                      <a:solidFill>
-                        <a:srgbClr val="2E2A24"/>
-                      </a:solidFill>
-                      <a:prstDash val="solid"/>
-                      <a:round/>
-                      <a:headEnd type="none" w="med" len="med"/>
-                      <a:tailEnd type="none" w="med" len="med"/>
-                    </a:lnR>
-                    <a:lnT w="7620" cap="flat" cmpd="sng" algn="ctr">
-                      <a:solidFill>
-                        <a:srgbClr val="2E2A24"/>
-                      </a:solidFill>
-                      <a:prstDash val="solid"/>
-                      <a:round/>
-                      <a:headEnd type="none" w="med" len="med"/>
-                      <a:tailEnd type="none" w="med" len="med"/>
-                    </a:lnT>
-                    <a:lnB w="7620" cap="flat" cmpd="sng" algn="ctr">
-                      <a:solidFill>
-                        <a:srgbClr val="2E2A24"/>
-                      </a:solidFill>
-                      <a:prstDash val="solid"/>
-                      <a:round/>
-                      <a:headEnd type="none" w="med" len="med"/>
-                      <a:tailEnd type="none" w="med" len="med"/>
-                    </a:lnB>
-                    <a:solidFill>
-                      <a:srgbClr val="171614"/>
-                    </a:solidFill>
-                  </a:tcPr>
-                </a:tc>
-                <a:tc>
-                  <a:txBody>
-                    <a:bodyPr/>
-                    <a:lstStyle/>
-                    <a:p>
-                      <a:pPr algn="ctr" indent="0" marL="0">
-                        <a:buNone/>
-                      </a:pPr>
-                      <a:r>
-                        <a:rPr lang="en-US" sz="850" dirty="0">
-                          <a:solidFill>
-                            <a:srgbClr val="EFEBE3"/>
-                          </a:solidFill>
-                          <a:latin typeface="Yu Gothic" pitchFamily="34" charset="0"/>
-                          <a:ea typeface="Yu Gothic" pitchFamily="34" charset="-122"/>
-                          <a:cs typeface="Yu Gothic" pitchFamily="34" charset="-120"/>
-                        </a:rPr>
-                        <a:t>64.55</a:t>
-                      </a:r>
-                      <a:endParaRPr lang="en-US" sz="850" dirty="0">
-                        <a:latin typeface="Yu Gothic" charset="0"/>
-                        <a:ea typeface="Yu Gothic" charset="0"/>
-                        <a:cs typeface="Yu Gothic" charset="0"/>
-                      </a:endParaRPr>
-                    </a:p>
-                  </a:txBody>
-                  <a:tcPr marL="45720" marR="45720" marT="45720" marB="45720" anchor="ctr">
-                    <a:lnL w="7620" cap="flat" cmpd="sng" algn="ctr">
-                      <a:solidFill>
-                        <a:srgbClr val="2E2A24"/>
-                      </a:solidFill>
-                      <a:prstDash val="solid"/>
-                      <a:round/>
-                      <a:headEnd type="none" w="med" len="med"/>
-                      <a:tailEnd type="none" w="med" len="med"/>
-                    </a:lnL>
-                    <a:lnR w="7620" cap="flat" cmpd="sng" algn="ctr">
-                      <a:solidFill>
-                        <a:srgbClr val="2E2A24"/>
-                      </a:solidFill>
-                      <a:prstDash val="solid"/>
-                      <a:round/>
-                      <a:headEnd type="none" w="med" len="med"/>
-                      <a:tailEnd type="none" w="med" len="med"/>
-                    </a:lnR>
-                    <a:lnT w="7620" cap="flat" cmpd="sng" algn="ctr">
-                      <a:solidFill>
-                        <a:srgbClr val="2E2A24"/>
-                      </a:solidFill>
-                      <a:prstDash val="solid"/>
-                      <a:round/>
-                      <a:headEnd type="none" w="med" len="med"/>
-                      <a:tailEnd type="none" w="med" len="med"/>
-                    </a:lnT>
-                    <a:lnB w="7620" cap="flat" cmpd="sng" algn="ctr">
-                      <a:solidFill>
-                        <a:srgbClr val="2E2A24"/>
-                      </a:solidFill>
-                      <a:prstDash val="solid"/>
-                      <a:round/>
-                      <a:headEnd type="none" w="med" len="med"/>
-                      <a:tailEnd type="none" w="med" len="med"/>
-                    </a:lnB>
-                    <a:solidFill>
-                      <a:srgbClr val="171614"/>
-                    </a:solidFill>
-                  </a:tcPr>
-                </a:tc>
-                <a:tc>
-                  <a:txBody>
-                    <a:bodyPr/>
-                    <a:lstStyle/>
-                    <a:p>
-                      <a:pPr algn="ctr" indent="0" marL="0">
-                        <a:buNone/>
-                      </a:pPr>
-                      <a:r>
-                        <a:rPr lang="en-US" sz="850" b="1" dirty="0">
-                          <a:solidFill>
-                            <a:srgbClr val="B4553F"/>
-                          </a:solidFill>
-                          <a:latin typeface="Yu Gothic" pitchFamily="34" charset="0"/>
-                          <a:ea typeface="Yu Gothic" pitchFamily="34" charset="-122"/>
-                          <a:cs typeface="Yu Gothic" pitchFamily="34" charset="-120"/>
-                        </a:rPr>
-                        <a:t>▲1.08</a:t>
-                      </a:r>
-                      <a:endParaRPr lang="en-US" sz="850" dirty="0">
-                        <a:latin typeface="Yu Gothic" charset="0"/>
-                        <a:ea typeface="Yu Gothic" charset="0"/>
-                        <a:cs typeface="Yu Gothic" charset="0"/>
-                      </a:endParaRPr>
-                    </a:p>
-                  </a:txBody>
-                  <a:tcPr marL="45720" marR="45720" marT="45720" marB="45720" anchor="ctr">
-                    <a:lnL w="7620" cap="flat" cmpd="sng" algn="ctr">
-                      <a:solidFill>
-                        <a:srgbClr val="2E2A24"/>
-                      </a:solidFill>
-                      <a:prstDash val="solid"/>
-                      <a:round/>
-                      <a:headEnd type="none" w="med" len="med"/>
-                      <a:tailEnd type="none" w="med" len="med"/>
-                    </a:lnL>
-                    <a:lnR w="7620" cap="flat" cmpd="sng" algn="ctr">
-                      <a:solidFill>
-                        <a:srgbClr val="2E2A24"/>
-                      </a:solidFill>
-                      <a:prstDash val="solid"/>
-                      <a:round/>
-                      <a:headEnd type="none" w="med" len="med"/>
-                      <a:tailEnd type="none" w="med" len="med"/>
-                    </a:lnR>
-                    <a:lnT w="7620" cap="flat" cmpd="sng" algn="ctr">
-                      <a:solidFill>
-                        <a:srgbClr val="2E2A24"/>
-                      </a:solidFill>
-                      <a:prstDash val="solid"/>
-                      <a:round/>
-                      <a:headEnd type="none" w="med" len="med"/>
-                      <a:tailEnd type="none" w="med" len="med"/>
-                    </a:lnT>
-                    <a:lnB w="7620" cap="flat" cmpd="sng" algn="ctr">
-                      <a:solidFill>
-                        <a:srgbClr val="2E2A24"/>
-                      </a:solidFill>
-                      <a:prstDash val="solid"/>
-                      <a:round/>
-                      <a:headEnd type="none" w="med" len="med"/>
-                      <a:tailEnd type="none" w="med" len="med"/>
-                    </a:lnB>
-                    <a:solidFill>
-                      <a:srgbClr val="171614"/>
-                    </a:solidFill>
-                  </a:tcPr>
-                </a:tc>
-              </a:tr>
             </a:tbl>
           </a:graphicData>
         </a:graphic>
@@ -15173,7 +14216,7 @@
                 <a:ea typeface="Yu Gothic" pitchFamily="34" charset="-122"/>
                 <a:cs typeface="Yu Gothic" pitchFamily="34" charset="-120"/>
               </a:rPr>
-              <a:t>引き取りの上限を設けることをご提案します。</a:t>
+              <a:t>引き取り条件は「＋30%もしくは要協議」とし、上限を設けることをご提案します。</a:t>
             </a:r>
             <a:endParaRPr lang="en-US" sz="1200" dirty="0"/>
           </a:p>
@@ -15215,7 +14258,7 @@
                 <a:ea typeface="Yu Gothic" pitchFamily="34" charset="-122"/>
                 <a:cs typeface="Yu Gothic" pitchFamily="34" charset="-120"/>
               </a:rPr>
-              <a:t>ワイン価格が上昇していれば引き取り後も薄いながら黒字だが、横ばいだと引き取った時点で逆ざやとなる（上表）。WineBankが無条件に全量を引き取る建て付けとすると、売れ残りが大きい局面でWineBankが立ち行かなくなり、かえって貴社のリスクとなる。そこで、引き取り義務に上限（例：ご投資額の20%まで）を設け、それを超える部分については①契約期間を延長して販売を継続する、②貴社に現物をお引き渡しする、のいずれかを選択いただく建て付けとしたい。上限の水準と超過分の扱いは、ご相談のうえ確定させたい。</a:t>
+              <a:t>ワイン価格が上昇していれば引き取り後も薄いながら黒字だが、横ばいだと引き取った時点で逆ざやとなる（上表）。WineBankが無条件に全量を＋30%で引き取る建て付けとすると、売れ残りが大きい局面でWineBankが立ち行かなくなり、かえって貴社のリスクとなる。そこで、引き取りは「＋30%もしくはその時点の市況を踏まえた協議」とし、あわせて無条件の引き取り義務に上限（例：ご投資額の20%まで）を設けることをご提案したい。上限を超える部分については①契約期間を延長して販売を継続する、②貴社に現物をお引き渡しする、のいずれかを選択いただく建て付けとする。</a:t>
             </a:r>
             <a:endParaRPr lang="en-US" sz="1000" dirty="0"/>
           </a:p>
@@ -15257,7 +14300,7 @@
                 <a:ea typeface="Yu Gothic" pitchFamily="34" charset="-122"/>
                 <a:cs typeface="Yu Gothic" pitchFamily="34" charset="-120"/>
               </a:rPr>
-              <a:t>※ 本頁はWineBank側からのご提案であり、倉持様よりご提示いただいた内容には含まれていない。引き取りを「義務」とするか「WineBankのオプション」とするかで、貴社の想定IRRが確定するか否かが変わるため、契約書作成前に確定させたい。</a:t>
+              <a:t>※ 引き取り率「＋30%もしくは要協議」は倉持様よりご提示いただいた条件。上限を設ける点はWineBank側からのご提案であり、ご提示内容には含まれていない。引き取りを「義務」とするか「WineBankのオプション」とするかで、貴社の想定IRRが確定するか否かが変わるため、契約書作成前に確定させたい。</a:t>
             </a:r>
             <a:endParaRPr lang="en-US" sz="800" dirty="0"/>
           </a:p>
@@ -22767,7 +21810,7 @@
                           <a:ea typeface="Yu Gothic" pitchFamily="34" charset="-122"/>
                           <a:cs typeface="Yu Gothic" pitchFamily="34" charset="-120"/>
                         </a:rPr>
-                        <a:t>残存在庫はWineBankが簿価＋30%で引き取る（上限は要協議）</a:t>
+                        <a:t>残存在庫はWineBankが簿価＋30%、もしくは要協議で引き取る（上限は要協議）</a:t>
                       </a:r>
                       <a:endParaRPr lang="en-US" sz="850" dirty="0">
                         <a:latin typeface="Yu Gothic" charset="0"/>
@@ -23073,7 +22116,7 @@
                           <a:ea typeface="Yu Gothic" pitchFamily="34" charset="-122"/>
                           <a:cs typeface="Yu Gothic" pitchFamily="34" charset="-120"/>
                         </a:rPr>
-                        <a:t>取得から6ヶ月以内 簿価＋7.5% ／ 7〜12ヶ月 簿価＋12.5% ／ 13〜24ヶ月 簿価＋30.0%</a:t>
+                        <a:t>取得から12ヶ月以内 簿価＋10.0% ／ 13〜24ヶ月 簿価＋20.0% ／ 24ヶ月超（残存） 簿価＋30.0%</a:t>
                       </a:r>
                       <a:endParaRPr lang="en-US" sz="850" dirty="0">
                         <a:latin typeface="Yu Gothic" charset="0"/>
@@ -23763,7 +22806,7 @@
                           <a:ea typeface="Yu Gothic" pitchFamily="34" charset="-122"/>
                           <a:cs typeface="Yu Gothic" pitchFamily="34" charset="-120"/>
                         </a:rPr>
-                        <a:t>IRR 15.7%（1年目80%・2年目20%で売却の場合）／純利益 1,160万円</a:t>
+                        <a:t>IRR 13.2%（1年目80%・2年目20%で売却の場合）／純利益 960万円</a:t>
                       </a:r>
                       <a:endParaRPr lang="en-US" sz="850" dirty="0">
                         <a:latin typeface="Yu Gothic" charset="0"/>
@@ -24560,7 +23603,7 @@
                 <a:ea typeface="Yu Gothic" pitchFamily="34" charset="-122"/>
                 <a:cs typeface="Yu Gothic" pitchFamily="34" charset="-120"/>
               </a:rPr>
-              <a:t>上乗せ率（13〜24ヶ月を30%とするか25%とするか）、契約期間、期間満了時の引き取り上限についてご意見をいただく。</a:t>
+              <a:t>上乗せ率（1年目10%・2年目20%）、契約期間、期間満了時の引き取り条件と上限についてご意見をいただく。</a:t>
             </a:r>
             <a:endParaRPr lang="en-US" sz="850" dirty="0"/>
           </a:p>
@@ -25365,7 +24408,7 @@
                 <a:ea typeface="Yu Gothic" pitchFamily="34" charset="-122"/>
                 <a:cs typeface="Yu Gothic" pitchFamily="34" charset="-120"/>
               </a:rPr>
-              <a:t>● 13〜24ヶ月の上乗せ率</a:t>
+              <a:t>● 2年目の上乗せ率</a:t>
             </a:r>
             <a:endParaRPr lang="en-US" sz="950" dirty="0"/>
           </a:p>
@@ -25407,7 +24450,7 @@
                 <a:ea typeface="Yu Gothic" pitchFamily="34" charset="-122"/>
                 <a:cs typeface="Yu Gothic" pitchFamily="34" charset="-120"/>
               </a:rPr>
-              <a:t>30%とすればIRRが15〜16%に揃う。25%とすると下振れ時のWineBankの耐性が高まる。</a:t>
+              <a:t>本案の20%では売却が2年目にずれ込むほどIRRが下がる。厚くすればIRRは揃うが、WineBankの下振れ耐性は下がる。</a:t>
             </a:r>
             <a:endParaRPr lang="en-US" sz="850" dirty="0"/>
           </a:p>
@@ -25488,7 +24531,7 @@
                 <a:ea typeface="Yu Gothic" pitchFamily="34" charset="-122"/>
                 <a:cs typeface="Yu Gothic" pitchFamily="34" charset="-120"/>
               </a:rPr>
-              <a:t>WineBankの義務とするか、オプションとするか。義務とする場合の上限をどこに置くか。</a:t>
+              <a:t>＋30%とするか要協議とするか。WineBankの義務とするかオプションとするか。義務とする場合の上限をどこに置くか。</a:t>
             </a:r>
             <a:endParaRPr lang="en-US" sz="850" dirty="0"/>
           </a:p>
@@ -26273,7 +25316,7 @@
                 <a:ea typeface="Yu Gothic" pitchFamily="34" charset="-122"/>
                 <a:cs typeface="Yu Gothic" pitchFamily="34" charset="-120"/>
               </a:rPr>
-              <a:t>売却ペースが変わってもIRRが揃います</a:t>
+              <a:t>1年で売り切るほどリターンが高くなります</a:t>
             </a:r>
             <a:endParaRPr lang="en-US" sz="1150" dirty="0"/>
           </a:p>
@@ -26315,7 +25358,7 @@
                 <a:ea typeface="Yu Gothic" pitchFamily="34" charset="-122"/>
                 <a:cs typeface="Yu Gothic" pitchFamily="34" charset="-120"/>
               </a:rPr>
-              <a:t>1年以内に売り切れても2年近くかかっても、想定IRRは概ね15〜16%。13〜24ヶ月の上乗せ率を厚くすることで、資金拘束が長引くことへの補償としている。</a:t>
+              <a:t>1年以内に売り切れれば想定IRR 16.3%。上乗せ率は1年目10%・2年目20%の2段階で、早期の売却がそのままリターンにつながる。</a:t>
             </a:r>
             <a:endParaRPr lang="en-US" sz="850" dirty="0"/>
           </a:p>
@@ -26973,7 +26016,7 @@
                 <a:ea typeface="Cambria" pitchFamily="34" charset="-122"/>
                 <a:cs typeface="Cambria" pitchFamily="34" charset="-120"/>
               </a:rPr>
-              <a:t>15.7%</a:t>
+              <a:t>13.2%</a:t>
             </a:r>
             <a:endParaRPr lang="en-US" sz="2000" dirty="0"/>
           </a:p>
@@ -27118,7 +26161,7 @@
                 <a:ea typeface="Cambria" pitchFamily="34" charset="-122"/>
                 <a:cs typeface="Cambria" pitchFamily="34" charset="-120"/>
               </a:rPr>
-              <a:t>1,160万円</a:t>
+              <a:t>960万円</a:t>
             </a:r>
             <a:endParaRPr lang="en-US" sz="2000" dirty="0"/>
           </a:p>
@@ -27160,7 +26203,7 @@
                 <a:ea typeface="Yu Gothic" pitchFamily="34" charset="-122"/>
                 <a:cs typeface="Yu Gothic" pitchFamily="34" charset="-120"/>
               </a:rPr>
-              <a:t>受取総額 11,400万円 − 元本 − 倉庫費 240万円</a:t>
+              <a:t>受取総額 11,200万円 − 元本 − 倉庫費 240万円</a:t>
             </a:r>
             <a:endParaRPr lang="en-US" sz="850" dirty="0"/>
           </a:p>
@@ -27263,7 +26306,7 @@
                 <a:ea typeface="Cambria" pitchFamily="34" charset="-122"/>
                 <a:cs typeface="Cambria" pitchFamily="34" charset="-120"/>
               </a:rPr>
-              <a:t>7.5% ／ 12.5% ／ 30.0%</a:t>
+              <a:t>＋10% ／ ＋20% ／ ＋30%</a:t>
             </a:r>
             <a:endParaRPr lang="en-US" sz="1500" dirty="0"/>
           </a:p>
@@ -27305,7 +26348,7 @@
                 <a:ea typeface="Yu Gothic" pitchFamily="34" charset="-122"/>
                 <a:cs typeface="Yu Gothic" pitchFamily="34" charset="-120"/>
               </a:rPr>
-              <a:t>6ヶ月以内 ／ 7〜12ヶ月 ／ 13〜24ヶ月</a:t>
+              <a:t>12ヶ月以内 ／ 13〜24ヶ月 ／ 24ヶ月超（残存）</a:t>
             </a:r>
             <a:endParaRPr lang="en-US" sz="850" dirty="0"/>
           </a:p>
@@ -28278,7 +27321,7 @@
                 <a:ea typeface="Cambria" pitchFamily="34" charset="-122"/>
                 <a:cs typeface="Cambria" pitchFamily="34" charset="-120"/>
               </a:rPr>
-              <a:t>15.7</a:t>
+              <a:t>13.2</a:t>
             </a:r>
             <a:pPr indent="0" marL="0">
               <a:buNone/>
@@ -28373,7 +27416,7 @@
                 <a:ea typeface="Yu Gothic" pitchFamily="34" charset="-122"/>
                 <a:cs typeface="Yu Gothic" pitchFamily="34" charset="-120"/>
               </a:rPr>
-              <a:t>1年目80%・2年目20%で売却した場合。売却ペースが変わっても15〜16%に収まる設計。</a:t>
+              <a:t>1年目80%・2年目20%で売却した場合。倉庫費・保険料を控除した後の数値。</a:t>
             </a:r>
             <a:endParaRPr lang="en-US" sz="900" dirty="0"/>
           </a:p>
@@ -28439,7 +27482,7 @@
                 <a:ea typeface="Cambria" pitchFamily="34" charset="-122"/>
                 <a:cs typeface="Cambria" pitchFamily="34" charset="-120"/>
               </a:rPr>
-              <a:t>30</a:t>
+              <a:t>＋10</a:t>
             </a:r>
             <a:pPr indent="0" marL="0">
               <a:buNone/>
@@ -28492,7 +27535,7 @@
                 <a:ea typeface="Yu Gothic" pitchFamily="34" charset="-122"/>
                 <a:cs typeface="Yu Gothic" pitchFamily="34" charset="-120"/>
               </a:rPr>
-              <a:t>13〜24ヶ月の固定リターン</a:t>
+              <a:t>1年目の固定リターン</a:t>
             </a:r>
             <a:endParaRPr lang="en-US" sz="1100" dirty="0"/>
           </a:p>
@@ -28534,7 +27577,7 @@
                 <a:ea typeface="Yu Gothic" pitchFamily="34" charset="-122"/>
                 <a:cs typeface="Yu Gothic" pitchFamily="34" charset="-120"/>
               </a:rPr>
-              <a:t>簿価に対する上乗せ率。6ヶ月以内は7.5%、7〜12ヶ月は12.5%。</a:t>
+              <a:t>簿価に対する上乗せ率。2年目は＋20%、24ヶ月超の残存は＋30%（もしくは要協議）。</a:t>
             </a:r>
             <a:endParaRPr lang="en-US" sz="900" dirty="0"/>
           </a:p>
@@ -28679,7 +27722,7 @@
                 <a:ea typeface="Yu Gothic" pitchFamily="34" charset="-122"/>
                 <a:cs typeface="Yu Gothic" pitchFamily="34" charset="-120"/>
               </a:rPr>
-              <a:t>WineBankの実際の販売価格・販売費・人件費は、貴社のリターンに影響しない。取得から6ヶ月以内 簿価＋7.5% ／ 7〜12ヶ月 簿価＋12.5% ／ 13〜24ヶ月 簿価＋30.0%。販売価格からの逆算や利益配分の計算は発生しない。</a:t>
+              <a:t>WineBankの実際の販売価格・販売費・人件費は、貴社のリターンに影響しない。取得から12ヶ月以内 簿価＋10.0% ／ 13〜24ヶ月 簿価＋20.0% ／ 24ヶ月超（残存） 簿価＋30.0%。販売価格からの逆算や利益配分の計算は発生しない。</a:t>
             </a:r>
             <a:endParaRPr lang="en-US" sz="950" dirty="0"/>
           </a:p>
@@ -30245,7 +29288,7 @@
                 <a:ea typeface="Yu Gothic" pitchFamily="34" charset="-122"/>
                 <a:cs typeface="Yu Gothic" pitchFamily="34" charset="-120"/>
               </a:rPr>
-              <a:t>取得から6ヶ月以内 簿価＋7.5%</a:t>
+              <a:t>取得から12ヶ月以内 簿価＋10.0%</a:t>
             </a:r>
             <a:endParaRPr lang="en-US" sz="900" dirty="0"/>
           </a:p>
@@ -31922,7 +30965,7 @@
                 <a:ea typeface="Yu Gothic" pitchFamily="34" charset="-122"/>
                 <a:cs typeface="Yu Gothic" pitchFamily="34" charset="-120"/>
               </a:rPr>
-              <a:t>取得から6ヶ月以内</a:t>
+              <a:t>取得から12ヶ月以内</a:t>
             </a:r>
             <a:endParaRPr lang="en-US" sz="1150" dirty="0"/>
           </a:p>
@@ -31936,7 +30979,7 @@
         </p:nvSpPr>
         <p:spPr>
           <a:xfrm>
-            <a:off x="859536" y="2084832"/>
+            <a:off x="859536" y="2066544"/>
             <a:ext cx="3039770" cy="201168"/>
           </a:xfrm>
           <a:prstGeom prst="rect">
@@ -31953,7 +30996,7 @@
               <a:buNone/>
             </a:pPr>
             <a:r>
-              <a:rPr lang="en-US" sz="900" dirty="0">
+              <a:rPr lang="en-US" sz="850" dirty="0">
                 <a:solidFill>
                   <a:srgbClr val="9A938A"/>
                 </a:solidFill>
@@ -31961,9 +31004,9 @@
                 <a:ea typeface="Yu Gothic" pitchFamily="34" charset="-122"/>
                 <a:cs typeface="Yu Gothic" pitchFamily="34" charset="-120"/>
               </a:rPr>
-              <a:t>簿価に対して</a:t>
+              <a:t>1年目に売却が成立した場合</a:t>
             </a:r>
-            <a:endParaRPr lang="en-US" sz="900" dirty="0"/>
+            <a:endParaRPr lang="en-US" sz="850" dirty="0"/>
           </a:p>
         </p:txBody>
       </p:sp>
@@ -32000,7 +31043,7 @@
                 <a:ea typeface="Cambria" pitchFamily="34" charset="-122"/>
                 <a:cs typeface="Cambria" pitchFamily="34" charset="-120"/>
               </a:rPr>
-              <a:t>＋7.5%</a:t>
+              <a:t>＋10.0%</a:t>
             </a:r>
             <a:endParaRPr lang="en-US" sz="3400" dirty="0"/>
           </a:p>
@@ -32039,7 +31082,7 @@
                 <a:ea typeface="Yu Gothic" pitchFamily="34" charset="-122"/>
                 <a:cs typeface="Yu Gothic" pitchFamily="34" charset="-120"/>
               </a:rPr>
-              <a:t>簿価1,000万円なら 1,075万円のお支払い</a:t>
+              <a:t>簿価1,000万円なら 1,100万円のお支払い</a:t>
             </a:r>
             <a:endParaRPr lang="en-US" sz="900" dirty="0"/>
           </a:p>
@@ -32105,7 +31148,7 @@
                 <a:ea typeface="Yu Gothic" pitchFamily="34" charset="-122"/>
                 <a:cs typeface="Yu Gothic" pitchFamily="34" charset="-120"/>
               </a:rPr>
-              <a:t>7〜12ヶ月</a:t>
+              <a:t>13〜24ヶ月</a:t>
             </a:r>
             <a:endParaRPr lang="en-US" sz="1150" dirty="0"/>
           </a:p>
@@ -32119,7 +31162,7 @@
         </p:nvSpPr>
         <p:spPr>
           <a:xfrm>
-            <a:off x="4575962" y="2084832"/>
+            <a:off x="4575962" y="2066544"/>
             <a:ext cx="3039770" cy="201168"/>
           </a:xfrm>
           <a:prstGeom prst="rect">
@@ -32136,7 +31179,7 @@
               <a:buNone/>
             </a:pPr>
             <a:r>
-              <a:rPr lang="en-US" sz="900" dirty="0">
+              <a:rPr lang="en-US" sz="850" dirty="0">
                 <a:solidFill>
                   <a:srgbClr val="9A938A"/>
                 </a:solidFill>
@@ -32144,9 +31187,9 @@
                 <a:ea typeface="Yu Gothic" pitchFamily="34" charset="-122"/>
                 <a:cs typeface="Yu Gothic" pitchFamily="34" charset="-120"/>
               </a:rPr>
-              <a:t>簿価に対して</a:t>
+              <a:t>2年目に売却が成立した場合</a:t>
             </a:r>
-            <a:endParaRPr lang="en-US" sz="900" dirty="0"/>
+            <a:endParaRPr lang="en-US" sz="850" dirty="0"/>
           </a:p>
         </p:txBody>
       </p:sp>
@@ -32183,7 +31226,7 @@
                 <a:ea typeface="Cambria" pitchFamily="34" charset="-122"/>
                 <a:cs typeface="Cambria" pitchFamily="34" charset="-120"/>
               </a:rPr>
-              <a:t>＋12.5%</a:t>
+              <a:t>＋20.0%</a:t>
             </a:r>
             <a:endParaRPr lang="en-US" sz="3400" dirty="0"/>
           </a:p>
@@ -32222,7 +31265,7 @@
                 <a:ea typeface="Yu Gothic" pitchFamily="34" charset="-122"/>
                 <a:cs typeface="Yu Gothic" pitchFamily="34" charset="-120"/>
               </a:rPr>
-              <a:t>簿価1,000万円なら 1,125万円のお支払い</a:t>
+              <a:t>簿価1,000万円なら 1,200万円のお支払い</a:t>
             </a:r>
             <a:endParaRPr lang="en-US" sz="900" dirty="0"/>
           </a:p>
@@ -32288,7 +31331,7 @@
                 <a:ea typeface="Yu Gothic" pitchFamily="34" charset="-122"/>
                 <a:cs typeface="Yu Gothic" pitchFamily="34" charset="-120"/>
               </a:rPr>
-              <a:t>13〜24ヶ月</a:t>
+              <a:t>24ヶ月超（残存）</a:t>
             </a:r>
             <a:endParaRPr lang="en-US" sz="1150" dirty="0"/>
           </a:p>
@@ -32302,7 +31345,7 @@
         </p:nvSpPr>
         <p:spPr>
           <a:xfrm>
-            <a:off x="8292389" y="2084832"/>
+            <a:off x="8292389" y="2066544"/>
             <a:ext cx="3039770" cy="201168"/>
           </a:xfrm>
           <a:prstGeom prst="rect">
@@ -32319,7 +31362,7 @@
               <a:buNone/>
             </a:pPr>
             <a:r>
-              <a:rPr lang="en-US" sz="900" dirty="0">
+              <a:rPr lang="en-US" sz="850" dirty="0">
                 <a:solidFill>
                   <a:srgbClr val="9A938A"/>
                 </a:solidFill>
@@ -32327,9 +31370,9 @@
                 <a:ea typeface="Yu Gothic" pitchFamily="34" charset="-122"/>
                 <a:cs typeface="Yu Gothic" pitchFamily="34" charset="-120"/>
               </a:rPr>
-              <a:t>簿価に対して</a:t>
+              <a:t>契約期間の満了時に残っていた場合</a:t>
             </a:r>
-            <a:endParaRPr lang="en-US" sz="900" dirty="0"/>
+            <a:endParaRPr lang="en-US" sz="850" dirty="0"/>
           </a:p>
         </p:txBody>
       </p:sp>
@@ -32399,13 +31442,13 @@
             <a:r>
               <a:rPr lang="en-US" sz="900" dirty="0">
                 <a:solidFill>
-                  <a:srgbClr val="9A938A"/>
+                  <a:srgbClr val="A78450"/>
                 </a:solidFill>
                 <a:latin typeface="Yu Gothic" pitchFamily="34" charset="0"/>
                 <a:ea typeface="Yu Gothic" pitchFamily="34" charset="-122"/>
                 <a:cs typeface="Yu Gothic" pitchFamily="34" charset="-120"/>
               </a:rPr>
-              <a:t>簿価1,000万円なら 1,300万円のお支払い</a:t>
+              <a:t>もしくは要協議</a:t>
             </a:r>
             <a:endParaRPr lang="en-US" sz="900" dirty="0"/>
           </a:p>
@@ -32618,7 +31661,7 @@
                 <a:ea typeface="Yu Gothic" pitchFamily="34" charset="-122"/>
                 <a:cs typeface="Yu Gothic" pitchFamily="34" charset="-120"/>
               </a:rPr>
-              <a:t>2年目の水準について</a:t>
+              <a:t>段階の置き方について</a:t>
             </a:r>
             <a:endParaRPr lang="en-US" sz="1100" dirty="0"/>
           </a:p>
@@ -32633,7 +31676,7 @@
         <p:spPr>
           <a:xfrm>
             <a:off x="6489040" y="3931920"/>
-            <a:ext cx="4788256" cy="694944"/>
+            <a:ext cx="4788256" cy="731520"/>
           </a:xfrm>
           <a:prstGeom prst="rect">
             <a:avLst/>
@@ -32652,7 +31695,7 @@
               <a:buNone/>
             </a:pPr>
             <a:r>
-              <a:rPr lang="en-US" sz="1000" dirty="0">
+              <a:rPr lang="en-US" sz="950" dirty="0">
                 <a:solidFill>
                   <a:srgbClr val="9A938A"/>
                 </a:solidFill>
@@ -32660,9 +31703,9 @@
                 <a:ea typeface="Yu Gothic" pitchFamily="34" charset="-122"/>
                 <a:cs typeface="Yu Gothic" pitchFamily="34" charset="-120"/>
               </a:rPr>
-              <a:t>13〜24ヶ月を30%と厚くしているのは、単なる高配当ではなく資金拘束期間が長くなることへの補償という位置づけによる。これにより、早く売れても2年近くかかっても、貴社のIRRが概ね15〜16%に揃う。</a:t>
+              <a:t>1年目10%・2年目20%は、資金拘束が1年延びることへの上乗せを10ポイントとした水準。24ヶ月超の30%は、契約期間の満了時に残っていた在庫をWineBankが引き取る際の率とする。ご参考までに、上乗せをより緩やかにした案との対比は次のとおり。</a:t>
             </a:r>
-            <a:endParaRPr lang="en-US" sz="1000" dirty="0"/>
+            <a:endParaRPr lang="en-US" sz="950" dirty="0"/>
           </a:p>
         </p:txBody>
       </p:sp>
@@ -32689,9 +31732,10 @@
             <a:tbl>
               <a:tblPr/>
               <a:tblGrid>
-                <a:gridCol w="2194560"/>
-                <a:gridCol w="1371600"/>
-                <a:gridCol w="1225296"/>
+                <a:gridCol w="1993392"/>
+                <a:gridCol w="932688"/>
+                <a:gridCol w="932688"/>
+                <a:gridCol w="932688"/>
               </a:tblGrid>
               <a:tr h="274320">
                 <a:tc>
@@ -32702,6 +31746,17 @@
                       <a:pPr algn="ctr" indent="0" marL="0">
                         <a:buNone/>
                       </a:pPr>
+                      <a:r>
+                        <a:rPr lang="en-US" sz="950" b="1" dirty="0">
+                          <a:solidFill>
+                            <a:srgbClr val="C9A96E"/>
+                          </a:solidFill>
+                          <a:latin typeface="Yu Gothic" pitchFamily="34" charset="0"/>
+                          <a:ea typeface="Yu Gothic" pitchFamily="34" charset="-122"/>
+                          <a:cs typeface="Yu Gothic" pitchFamily="34" charset="-120"/>
+                        </a:rPr>
+                        <a:t>13〜24ヶ月の水準</a:t>
+                      </a:r>
                       <a:endParaRPr lang="en-US" sz="950" dirty="0">
                         <a:latin typeface="Yu Gothic" charset="0"/>
                         <a:ea typeface="Yu Gothic" charset="0"/>
@@ -32768,7 +31823,7 @@
                           <a:ea typeface="Yu Gothic" pitchFamily="34" charset="-122"/>
                           <a:cs typeface="Yu Gothic" pitchFamily="34" charset="-120"/>
                         </a:rPr>
-                        <a:t>1年目80%・2年目20%</a:t>
+                        <a:t>1年で100%</a:t>
                       </a:r>
                       <a:endParaRPr lang="en-US" sz="950" dirty="0">
                         <a:latin typeface="Yu Gothic" charset="0"/>
@@ -32836,7 +31891,75 @@
                           <a:ea typeface="Yu Gothic" pitchFamily="34" charset="-122"/>
                           <a:cs typeface="Yu Gothic" pitchFamily="34" charset="-120"/>
                         </a:rPr>
-                        <a:t>1年目50%・2年目50%</a:t>
+                        <a:t>80%→20%</a:t>
+                      </a:r>
+                      <a:endParaRPr lang="en-US" sz="950" dirty="0">
+                        <a:latin typeface="Yu Gothic" charset="0"/>
+                        <a:ea typeface="Yu Gothic" charset="0"/>
+                        <a:cs typeface="Yu Gothic" charset="0"/>
+                      </a:endParaRPr>
+                    </a:p>
+                  </a:txBody>
+                  <a:tcPr marL="45720" marR="45720" marT="45720" marB="45720" anchor="ctr">
+                    <a:lnL w="7620" cap="flat" cmpd="sng" algn="ctr">
+                      <a:solidFill>
+                        <a:srgbClr val="2E2A24"/>
+                      </a:solidFill>
+                      <a:prstDash val="solid"/>
+                      <a:round/>
+                      <a:headEnd type="none" w="med" len="med"/>
+                      <a:tailEnd type="none" w="med" len="med"/>
+                    </a:lnL>
+                    <a:lnR w="7620" cap="flat" cmpd="sng" algn="ctr">
+                      <a:solidFill>
+                        <a:srgbClr val="2E2A24"/>
+                      </a:solidFill>
+                      <a:prstDash val="solid"/>
+                      <a:round/>
+                      <a:headEnd type="none" w="med" len="med"/>
+                      <a:tailEnd type="none" w="med" len="med"/>
+                    </a:lnR>
+                    <a:lnT w="7620" cap="flat" cmpd="sng" algn="ctr">
+                      <a:solidFill>
+                        <a:srgbClr val="2E2A24"/>
+                      </a:solidFill>
+                      <a:prstDash val="solid"/>
+                      <a:round/>
+                      <a:headEnd type="none" w="med" len="med"/>
+                      <a:tailEnd type="none" w="med" len="med"/>
+                    </a:lnT>
+                    <a:lnB w="7620" cap="flat" cmpd="sng" algn="ctr">
+                      <a:solidFill>
+                        <a:srgbClr val="2E2A24"/>
+                      </a:solidFill>
+                      <a:prstDash val="solid"/>
+                      <a:round/>
+                      <a:headEnd type="none" w="med" len="med"/>
+                      <a:tailEnd type="none" w="med" len="med"/>
+                    </a:lnB>
+                    <a:solidFill>
+                      <a:srgbClr val="231F1A"/>
+                    </a:solidFill>
+                  </a:tcPr>
+                </a:tc>
+                <a:tc>
+                  <a:txBody>
+                    <a:bodyPr/>
+                    <a:lstStyle/>
+                    <a:p>
+                      <a:pPr algn="ctr" indent="0" marL="0">
+                        <a:buNone/>
+                      </a:pPr>
+                      <a:r>
+                        <a:rPr lang="en-US" sz="950" b="1" dirty="0">
+                          <a:solidFill>
+                            <a:srgbClr val="C9A96E"/>
+                          </a:solidFill>
+                          <a:latin typeface="Yu Gothic" pitchFamily="34" charset="0"/>
+                          <a:ea typeface="Yu Gothic" pitchFamily="34" charset="-122"/>
+                          <a:cs typeface="Yu Gothic" pitchFamily="34" charset="-120"/>
+                        </a:rPr>
+                        <a:t>50%→50%</a:t>
                       </a:r>
                       <a:endParaRPr lang="en-US" sz="950" dirty="0">
                         <a:latin typeface="Yu Gothic" charset="0"/>
@@ -32898,7 +32021,7 @@
                         <a:buNone/>
                       </a:pPr>
                       <a:r>
-                        <a:rPr lang="en-US" sz="900" b="1" dirty="0">
+                        <a:rPr lang="en-US" sz="850" b="1" dirty="0">
                           <a:solidFill>
                             <a:srgbClr val="C9A96E"/>
                           </a:solidFill>
@@ -32906,9 +32029,9 @@
                           <a:ea typeface="Yu Gothic" pitchFamily="34" charset="-122"/>
                           <a:cs typeface="Yu Gothic" pitchFamily="34" charset="-120"/>
                         </a:rPr>
-                        <a:t>13〜24ヶ月を30%とする場合</a:t>
+                        <a:t>本案　10% / 20% / 30%</a:t>
                       </a:r>
-                      <a:endParaRPr lang="en-US" sz="900" dirty="0">
+                      <a:endParaRPr lang="en-US" sz="850" dirty="0">
                         <a:latin typeface="Yu Gothic" charset="0"/>
                         <a:ea typeface="Yu Gothic" charset="0"/>
                         <a:cs typeface="Yu Gothic" charset="0"/>
@@ -32966,7 +32089,7 @@
                         <a:buNone/>
                       </a:pPr>
                       <a:r>
-                        <a:rPr lang="en-US" sz="900" b="1" dirty="0">
+                        <a:rPr lang="en-US" sz="850" b="1" dirty="0">
                           <a:solidFill>
                             <a:srgbClr val="C9A96E"/>
                           </a:solidFill>
@@ -32974,9 +32097,9 @@
                           <a:ea typeface="Yu Gothic" pitchFamily="34" charset="-122"/>
                           <a:cs typeface="Yu Gothic" pitchFamily="34" charset="-120"/>
                         </a:rPr>
-                        <a:t>15.7%</a:t>
+                        <a:t>16.3%</a:t>
                       </a:r>
-                      <a:endParaRPr lang="en-US" sz="900" dirty="0">
+                      <a:endParaRPr lang="en-US" sz="850" dirty="0">
                         <a:latin typeface="Yu Gothic" charset="0"/>
                         <a:ea typeface="Yu Gothic" charset="0"/>
                         <a:cs typeface="Yu Gothic" charset="0"/>
@@ -33034,7 +32157,7 @@
                         <a:buNone/>
                       </a:pPr>
                       <a:r>
-                        <a:rPr lang="en-US" sz="900" b="1" dirty="0">
+                        <a:rPr lang="en-US" sz="850" b="1" dirty="0">
                           <a:solidFill>
                             <a:srgbClr val="C9A96E"/>
                           </a:solidFill>
@@ -33042,9 +32165,77 @@
                           <a:ea typeface="Yu Gothic" pitchFamily="34" charset="-122"/>
                           <a:cs typeface="Yu Gothic" pitchFamily="34" charset="-120"/>
                         </a:rPr>
-                        <a:t>16.4%</a:t>
+                        <a:t>13.2%</a:t>
                       </a:r>
-                      <a:endParaRPr lang="en-US" sz="900" dirty="0">
+                      <a:endParaRPr lang="en-US" sz="850" dirty="0">
+                        <a:latin typeface="Yu Gothic" charset="0"/>
+                        <a:ea typeface="Yu Gothic" charset="0"/>
+                        <a:cs typeface="Yu Gothic" charset="0"/>
+                      </a:endParaRPr>
+                    </a:p>
+                  </a:txBody>
+                  <a:tcPr marL="45720" marR="45720" marT="45720" marB="45720" anchor="ctr">
+                    <a:lnL w="7620" cap="flat" cmpd="sng" algn="ctr">
+                      <a:solidFill>
+                        <a:srgbClr val="2E2A24"/>
+                      </a:solidFill>
+                      <a:prstDash val="solid"/>
+                      <a:round/>
+                      <a:headEnd type="none" w="med" len="med"/>
+                      <a:tailEnd type="none" w="med" len="med"/>
+                    </a:lnL>
+                    <a:lnR w="7620" cap="flat" cmpd="sng" algn="ctr">
+                      <a:solidFill>
+                        <a:srgbClr val="2E2A24"/>
+                      </a:solidFill>
+                      <a:prstDash val="solid"/>
+                      <a:round/>
+                      <a:headEnd type="none" w="med" len="med"/>
+                      <a:tailEnd type="none" w="med" len="med"/>
+                    </a:lnR>
+                    <a:lnT w="7620" cap="flat" cmpd="sng" algn="ctr">
+                      <a:solidFill>
+                        <a:srgbClr val="2E2A24"/>
+                      </a:solidFill>
+                      <a:prstDash val="solid"/>
+                      <a:round/>
+                      <a:headEnd type="none" w="med" len="med"/>
+                      <a:tailEnd type="none" w="med" len="med"/>
+                    </a:lnT>
+                    <a:lnB w="7620" cap="flat" cmpd="sng" algn="ctr">
+                      <a:solidFill>
+                        <a:srgbClr val="2E2A24"/>
+                      </a:solidFill>
+                      <a:prstDash val="solid"/>
+                      <a:round/>
+                      <a:headEnd type="none" w="med" len="med"/>
+                      <a:tailEnd type="none" w="med" len="med"/>
+                    </a:lnB>
+                    <a:solidFill>
+                      <a:srgbClr val="171614"/>
+                    </a:solidFill>
+                  </a:tcPr>
+                </a:tc>
+                <a:tc>
+                  <a:txBody>
+                    <a:bodyPr/>
+                    <a:lstStyle/>
+                    <a:p>
+                      <a:pPr algn="ctr" indent="0" marL="0">
+                        <a:buNone/>
+                      </a:pPr>
+                      <a:r>
+                        <a:rPr lang="en-US" sz="850" b="1" dirty="0">
+                          <a:solidFill>
+                            <a:srgbClr val="C9A96E"/>
+                          </a:solidFill>
+                          <a:latin typeface="Yu Gothic" pitchFamily="34" charset="0"/>
+                          <a:ea typeface="Yu Gothic" pitchFamily="34" charset="-122"/>
+                          <a:cs typeface="Yu Gothic" pitchFamily="34" charset="-120"/>
+                        </a:rPr>
+                        <a:t>12.0%</a:t>
+                      </a:r>
+                      <a:endParaRPr lang="en-US" sz="850" dirty="0">
                         <a:latin typeface="Yu Gothic" charset="0"/>
                         <a:ea typeface="Yu Gothic" charset="0"/>
                         <a:cs typeface="Yu Gothic" charset="0"/>
@@ -33104,7 +32295,7 @@
                         <a:buNone/>
                       </a:pPr>
                       <a:r>
-                        <a:rPr lang="en-US" sz="900" dirty="0">
+                        <a:rPr lang="en-US" sz="850" dirty="0">
                           <a:solidFill>
                             <a:srgbClr val="EFEBE3"/>
                           </a:solidFill>
@@ -33112,9 +32303,9 @@
                           <a:ea typeface="Yu Gothic" pitchFamily="34" charset="-122"/>
                           <a:cs typeface="Yu Gothic" pitchFamily="34" charset="-120"/>
                         </a:rPr>
-                        <a:t>13〜24ヶ月を25%とする場合</a:t>
+                        <a:t>対比　7.5% / 12.5% / 30.0%</a:t>
                       </a:r>
-                      <a:endParaRPr lang="en-US" sz="900" dirty="0">
+                      <a:endParaRPr lang="en-US" sz="850" dirty="0">
                         <a:latin typeface="Yu Gothic" charset="0"/>
                         <a:ea typeface="Yu Gothic" charset="0"/>
                         <a:cs typeface="Yu Gothic" charset="0"/>
@@ -33172,7 +32363,7 @@
                         <a:buNone/>
                       </a:pPr>
                       <a:r>
-                        <a:rPr lang="en-US" sz="900" dirty="0">
+                        <a:rPr lang="en-US" sz="850" dirty="0">
                           <a:solidFill>
                             <a:srgbClr val="EFEBE3"/>
                           </a:solidFill>
@@ -33180,9 +32371,9 @@
                           <a:ea typeface="Yu Gothic" pitchFamily="34" charset="-122"/>
                           <a:cs typeface="Yu Gothic" pitchFamily="34" charset="-120"/>
                         </a:rPr>
-                        <a:t>14.4%</a:t>
+                        <a:t>16.1%</a:t>
                       </a:r>
-                      <a:endParaRPr lang="en-US" sz="900" dirty="0">
+                      <a:endParaRPr lang="en-US" sz="850" dirty="0">
                         <a:latin typeface="Yu Gothic" charset="0"/>
                         <a:ea typeface="Yu Gothic" charset="0"/>
                         <a:cs typeface="Yu Gothic" charset="0"/>
@@ -33240,7 +32431,7 @@
                         <a:buNone/>
                       </a:pPr>
                       <a:r>
-                        <a:rPr lang="en-US" sz="900" dirty="0">
+                        <a:rPr lang="en-US" sz="850" dirty="0">
                           <a:solidFill>
                             <a:srgbClr val="EFEBE3"/>
                           </a:solidFill>
@@ -33248,9 +32439,77 @@
                           <a:ea typeface="Yu Gothic" pitchFamily="34" charset="-122"/>
                           <a:cs typeface="Yu Gothic" pitchFamily="34" charset="-120"/>
                         </a:rPr>
-                        <a:t>14.2%</a:t>
+                        <a:t>15.7%</a:t>
                       </a:r>
-                      <a:endParaRPr lang="en-US" sz="900" dirty="0">
+                      <a:endParaRPr lang="en-US" sz="850" dirty="0">
+                        <a:latin typeface="Yu Gothic" charset="0"/>
+                        <a:ea typeface="Yu Gothic" charset="0"/>
+                        <a:cs typeface="Yu Gothic" charset="0"/>
+                      </a:endParaRPr>
+                    </a:p>
+                  </a:txBody>
+                  <a:tcPr marL="45720" marR="45720" marT="45720" marB="45720" anchor="ctr">
+                    <a:lnL w="7620" cap="flat" cmpd="sng" algn="ctr">
+                      <a:solidFill>
+                        <a:srgbClr val="2E2A24"/>
+                      </a:solidFill>
+                      <a:prstDash val="solid"/>
+                      <a:round/>
+                      <a:headEnd type="none" w="med" len="med"/>
+                      <a:tailEnd type="none" w="med" len="med"/>
+                    </a:lnL>
+                    <a:lnR w="7620" cap="flat" cmpd="sng" algn="ctr">
+                      <a:solidFill>
+                        <a:srgbClr val="2E2A24"/>
+                      </a:solidFill>
+                      <a:prstDash val="solid"/>
+                      <a:round/>
+                      <a:headEnd type="none" w="med" len="med"/>
+                      <a:tailEnd type="none" w="med" len="med"/>
+                    </a:lnR>
+                    <a:lnT w="7620" cap="flat" cmpd="sng" algn="ctr">
+                      <a:solidFill>
+                        <a:srgbClr val="2E2A24"/>
+                      </a:solidFill>
+                      <a:prstDash val="solid"/>
+                      <a:round/>
+                      <a:headEnd type="none" w="med" len="med"/>
+                      <a:tailEnd type="none" w="med" len="med"/>
+                    </a:lnT>
+                    <a:lnB w="7620" cap="flat" cmpd="sng" algn="ctr">
+                      <a:solidFill>
+                        <a:srgbClr val="2E2A24"/>
+                      </a:solidFill>
+                      <a:prstDash val="solid"/>
+                      <a:round/>
+                      <a:headEnd type="none" w="med" len="med"/>
+                      <a:tailEnd type="none" w="med" len="med"/>
+                    </a:lnB>
+                    <a:solidFill>
+                      <a:srgbClr val="171614"/>
+                    </a:solidFill>
+                  </a:tcPr>
+                </a:tc>
+                <a:tc>
+                  <a:txBody>
+                    <a:bodyPr/>
+                    <a:lstStyle/>
+                    <a:p>
+                      <a:pPr algn="ctr" indent="0" marL="0">
+                        <a:buNone/>
+                      </a:pPr>
+                      <a:r>
+                        <a:rPr lang="en-US" sz="850" dirty="0">
+                          <a:solidFill>
+                            <a:srgbClr val="EFEBE3"/>
+                          </a:solidFill>
+                          <a:latin typeface="Yu Gothic" pitchFamily="34" charset="0"/>
+                          <a:ea typeface="Yu Gothic" pitchFamily="34" charset="-122"/>
+                          <a:cs typeface="Yu Gothic" pitchFamily="34" charset="-120"/>
+                        </a:rPr>
+                        <a:t>16.4%</a:t>
+                      </a:r>
+                      <a:endParaRPr lang="en-US" sz="850" dirty="0">
                         <a:latin typeface="Yu Gothic" charset="0"/>
                         <a:ea typeface="Yu Gothic" charset="0"/>
                         <a:cs typeface="Yu Gothic" charset="0"/>
@@ -33340,7 +32599,7 @@
                 <a:ea typeface="Yu Gothic" pitchFamily="34" charset="-122"/>
                 <a:cs typeface="Yu Gothic" pitchFamily="34" charset="-120"/>
               </a:rPr>
-              <a:t>※ 簿価とは、貴社がWineBankから現物を取得された価格（市中原価＋5%）。上乗せ率は保有期間、すなわち取得から売却成立までの月数で判定する。ご投資額1.00億円は定価換算で約1.90億円相当のワインにあたる。</a:t>
+              <a:t>※ 簿価とは、貴社がWineBankから現物を取得された価格（市中原価＋5%）。上乗せ率は保有期間、すなわち取得から売却成立までの月数で判定する。24ヶ月超の30%は契約期間の満了時に残存した在庫の引き取り率であり、水準は要協議とする（後掲）。ご投資額1.00億円は定価換算で約1.90億円相当のワインにあたる。</a:t>
             </a:r>
             <a:endParaRPr lang="en-US" sz="800" dirty="0"/>
           </a:p>
@@ -33450,7 +32709,7 @@
                 <a:ea typeface="Yu Mincho" pitchFamily="34" charset="-122"/>
                 <a:cs typeface="Yu Mincho" pitchFamily="34" charset="-120"/>
               </a:rPr>
-              <a:t>想定IRR：売却ペースが変わっても15〜16%</a:t>
+              <a:t>想定IRR：早く売り切るほど高くなります</a:t>
             </a:r>
             <a:endParaRPr lang="en-US" sz="2700" dirty="0"/>
           </a:p>
@@ -33489,7 +32748,7 @@
                 <a:ea typeface="Yu Gothic" pitchFamily="34" charset="-122"/>
                 <a:cs typeface="Yu Gothic" pitchFamily="34" charset="-120"/>
               </a:rPr>
-              <a:t>ご投資額1億円。各期間内で概ね均等に売却される前提。倉庫費・保険料を控除した後の数値。</a:t>
+              <a:t>ご投資額1億円。各期間内で毎月フラットに売却される前提。倉庫費・保険料を控除した後の数値。</a:t>
             </a:r>
             <a:endParaRPr lang="en-US" sz="1150" dirty="0"/>
           </a:p>
@@ -34371,7 +33630,7 @@
                           <a:ea typeface="Yu Gothic" pitchFamily="34" charset="-122"/>
                           <a:cs typeface="Yu Gothic" pitchFamily="34" charset="-120"/>
                         </a:rPr>
-                        <a:t>16.1%</a:t>
+                        <a:t>16.3%</a:t>
                       </a:r>
                       <a:endParaRPr lang="en-US" sz="950" dirty="0">
                         <a:latin typeface="Yu Gothic" charset="0"/>
@@ -34577,7 +33836,7 @@
                           <a:ea typeface="Yu Gothic" pitchFamily="34" charset="-122"/>
                           <a:cs typeface="Yu Gothic" pitchFamily="34" charset="-120"/>
                         </a:rPr>
-                        <a:t>11,400万円</a:t>
+                        <a:t>11,200万円</a:t>
                       </a:r>
                       <a:endParaRPr lang="en-US" sz="950" dirty="0">
                         <a:latin typeface="Yu Gothic" charset="0"/>
@@ -34713,7 +33972,7 @@
                           <a:ea typeface="Yu Gothic" pitchFamily="34" charset="-122"/>
                           <a:cs typeface="Yu Gothic" pitchFamily="34" charset="-120"/>
                         </a:rPr>
-                        <a:t>1,160万円</a:t>
+                        <a:t>960万円</a:t>
                       </a:r>
                       <a:endParaRPr lang="en-US" sz="950" dirty="0">
                         <a:latin typeface="Yu Gothic" charset="0"/>
@@ -34781,7 +34040,7 @@
                           <a:ea typeface="Yu Gothic" pitchFamily="34" charset="-122"/>
                           <a:cs typeface="Yu Gothic" pitchFamily="34" charset="-120"/>
                         </a:rPr>
-                        <a:t>15.7%</a:t>
+                        <a:t>13.2%</a:t>
                       </a:r>
                       <a:endParaRPr lang="en-US" sz="950" dirty="0">
                         <a:latin typeface="Yu Gothic" charset="0"/>
@@ -34987,7 +34246,7 @@
                           <a:ea typeface="Yu Gothic" pitchFamily="34" charset="-122"/>
                           <a:cs typeface="Yu Gothic" pitchFamily="34" charset="-120"/>
                         </a:rPr>
-                        <a:t>12,000万円</a:t>
+                        <a:t>11,500万円</a:t>
                       </a:r>
                       <a:endParaRPr lang="en-US" sz="950" dirty="0">
                         <a:latin typeface="Yu Gothic" charset="0"/>
@@ -35123,7 +34382,7 @@
                           <a:ea typeface="Yu Gothic" pitchFamily="34" charset="-122"/>
                           <a:cs typeface="Yu Gothic" pitchFamily="34" charset="-120"/>
                         </a:rPr>
-                        <a:t>1,760万円</a:t>
+                        <a:t>1,260万円</a:t>
                       </a:r>
                       <a:endParaRPr lang="en-US" sz="950" dirty="0">
                         <a:latin typeface="Yu Gothic" charset="0"/>
@@ -35191,7 +34450,7 @@
                           <a:ea typeface="Yu Gothic" pitchFamily="34" charset="-122"/>
                           <a:cs typeface="Yu Gothic" pitchFamily="34" charset="-120"/>
                         </a:rPr>
-                        <a:t>16.4%</a:t>
+                        <a:t>12.0%</a:t>
                       </a:r>
                       <a:endParaRPr lang="en-US" sz="950" dirty="0">
                         <a:latin typeface="Yu Gothic" charset="0"/>
@@ -35397,7 +34656,7 @@
                           <a:ea typeface="Yu Gothic" pitchFamily="34" charset="-122"/>
                           <a:cs typeface="Yu Gothic" pitchFamily="34" charset="-120"/>
                         </a:rPr>
-                        <a:t>12,400万円</a:t>
+                        <a:t>11,700万円</a:t>
                       </a:r>
                       <a:endParaRPr lang="en-US" sz="950" dirty="0">
                         <a:latin typeface="Yu Gothic" charset="0"/>
@@ -35533,7 +34792,7 @@
                           <a:ea typeface="Yu Gothic" pitchFamily="34" charset="-122"/>
                           <a:cs typeface="Yu Gothic" pitchFamily="34" charset="-120"/>
                         </a:rPr>
-                        <a:t>2,160万円</a:t>
+                        <a:t>1,460万円</a:t>
                       </a:r>
                       <a:endParaRPr lang="en-US" sz="950" dirty="0">
                         <a:latin typeface="Yu Gothic" charset="0"/>
@@ -35601,7 +34860,7 @@
                           <a:ea typeface="Yu Gothic" pitchFamily="34" charset="-122"/>
                           <a:cs typeface="Yu Gothic" pitchFamily="34" charset="-120"/>
                         </a:rPr>
-                        <a:t>16.7%</a:t>
+                        <a:t>11.5%</a:t>
                       </a:r>
                       <a:endParaRPr lang="en-US" sz="950" dirty="0">
                         <a:latin typeface="Yu Gothic" charset="0"/>
@@ -35717,7 +34976,7 @@
                 <a:ea typeface="Yu Gothic" pitchFamily="34" charset="-122"/>
                 <a:cs typeface="Yu Gothic" pitchFamily="34" charset="-120"/>
               </a:rPr>
-              <a:t>早く売れても、2年近くかかっても、IRRは概ね15〜16%に揃います。</a:t>
+              <a:t>1年で売り切れれば 16.3%、2年目にずれ込むほど下がります。</a:t>
             </a:r>
             <a:endParaRPr lang="en-US" sz="1200" dirty="0"/>
           </a:p>
@@ -35732,7 +34991,7 @@
         <p:spPr>
           <a:xfrm>
             <a:off x="932688" y="3968496"/>
-            <a:ext cx="10326319" cy="512064"/>
+            <a:ext cx="10326319" cy="548640"/>
           </a:xfrm>
           <a:prstGeom prst="rect">
             <a:avLst/>
@@ -35759,7 +35018,7 @@
                 <a:ea typeface="Yu Gothic" pitchFamily="34" charset="-122"/>
                 <a:cs typeface="Yu Gothic" pitchFamily="34" charset="-120"/>
               </a:rPr>
-              <a:t>13〜24ヶ月の上乗せ率を30%と厚くしていることで、売却が2年目にずれ込んだ場合でもIRRが落ちない。売れ行きの巧拙にかかわらず、貴社のリターンが安定する設計としている。</a:t>
+              <a:t>上乗せ率が1年目10%・2年目20%であるのに対し、資金の拘束期間は倍になるため、売却が2年目にずれ込むほどIRRは低下する。したがって本設計では、1年で多くを売り切ることが前提となる。なお2年目の上乗せをさらに厚くすれば売却ペースによらずIRRを揃えることもできるが、その分WineBank側の下振れ耐性は下がる（後掲の対比）。</a:t>
             </a:r>
             <a:endParaRPr lang="en-US" sz="950" dirty="0"/>
           </a:p>
@@ -35817,7 +35076,7 @@
                 <a:ea typeface="Yu Gothic" pitchFamily="34" charset="-122"/>
                 <a:cs typeface="Yu Gothic" pitchFamily="34" charset="-120"/>
               </a:rPr>
-              <a:t>※ IRRは月次のキャッシュフロー（毎月の精算入金から倉庫費・保険料を控除したもの）から算出し、年率に換算したもの。倉庫費・保険料は在庫の残存にかかわらず年額固定で計上する保守的な置き方としている。</a:t>
+              <a:t>※ IRRは月次のキャッシュフロー（毎月の精算入金から倉庫費・保険料を控除したもの）から算出し、年率に換算したもの。倉庫費・保険料は在庫の残存にかかわらず年額固定で計上する保守的な置き方としている。倉持様よりご提示いただいた19.5%・16%・14.4%は倉庫費・保険料の控除前の数値であり、本表は控除後の数値である。</a:t>
             </a:r>
             <a:endParaRPr lang="en-US" sz="800" dirty="0"/>
           </a:p>
@@ -36644,7 +35903,7 @@
                           <a:ea typeface="Yu Gothic" pitchFamily="34" charset="-122"/>
                           <a:cs typeface="Yu Gothic" pitchFamily="34" charset="-120"/>
                         </a:rPr>
-                        <a:t>＋7.5%</a:t>
+                        <a:t>＋10.0%</a:t>
                       </a:r>
                       <a:endParaRPr lang="en-US" sz="900" dirty="0">
                         <a:latin typeface="Yu Gothic" charset="0"/>
@@ -36712,7 +35971,7 @@
                           <a:ea typeface="Yu Gothic" pitchFamily="34" charset="-122"/>
                           <a:cs typeface="Yu Gothic" pitchFamily="34" charset="-120"/>
                         </a:rPr>
-                        <a:t>717万円</a:t>
+                        <a:t>733万円</a:t>
                       </a:r>
                       <a:endParaRPr lang="en-US" sz="900" dirty="0">
                         <a:latin typeface="Yu Gothic" charset="0"/>
@@ -36848,7 +36107,7 @@
                           <a:ea typeface="Yu Gothic" pitchFamily="34" charset="-122"/>
                           <a:cs typeface="Yu Gothic" pitchFamily="34" charset="-120"/>
                         </a:rPr>
-                        <a:t>703万円</a:t>
+                        <a:t>720万円</a:t>
                       </a:r>
                       <a:endParaRPr lang="en-US" sz="900" dirty="0">
                         <a:latin typeface="Yu Gothic" charset="0"/>
@@ -37054,7 +36313,7 @@
                           <a:ea typeface="Yu Gothic" pitchFamily="34" charset="-122"/>
                           <a:cs typeface="Yu Gothic" pitchFamily="34" charset="-120"/>
                         </a:rPr>
-                        <a:t>＋7.5%</a:t>
+                        <a:t>＋10.0%</a:t>
                       </a:r>
                       <a:endParaRPr lang="en-US" sz="900" dirty="0">
                         <a:latin typeface="Yu Gothic" charset="0"/>
@@ -37122,7 +36381,7 @@
                           <a:ea typeface="Yu Gothic" pitchFamily="34" charset="-122"/>
                           <a:cs typeface="Yu Gothic" pitchFamily="34" charset="-120"/>
                         </a:rPr>
-                        <a:t>717万円</a:t>
+                        <a:t>733万円</a:t>
                       </a:r>
                       <a:endParaRPr lang="en-US" sz="900" dirty="0">
                         <a:latin typeface="Yu Gothic" charset="0"/>
@@ -37258,7 +36517,7 @@
                           <a:ea typeface="Yu Gothic" pitchFamily="34" charset="-122"/>
                           <a:cs typeface="Yu Gothic" pitchFamily="34" charset="-120"/>
                         </a:rPr>
-                        <a:t>703万円</a:t>
+                        <a:t>720万円</a:t>
                       </a:r>
                       <a:endParaRPr lang="en-US" sz="900" dirty="0">
                         <a:latin typeface="Yu Gothic" charset="0"/>
@@ -37464,7 +36723,7 @@
                           <a:ea typeface="Yu Gothic" pitchFamily="34" charset="-122"/>
                           <a:cs typeface="Yu Gothic" pitchFamily="34" charset="-120"/>
                         </a:rPr>
-                        <a:t>＋7.5%</a:t>
+                        <a:t>＋10.0%</a:t>
                       </a:r>
                       <a:endParaRPr lang="en-US" sz="900" dirty="0">
                         <a:latin typeface="Yu Gothic" charset="0"/>
@@ -37532,7 +36791,7 @@
                           <a:ea typeface="Yu Gothic" pitchFamily="34" charset="-122"/>
                           <a:cs typeface="Yu Gothic" pitchFamily="34" charset="-120"/>
                         </a:rPr>
-                        <a:t>717万円</a:t>
+                        <a:t>733万円</a:t>
                       </a:r>
                       <a:endParaRPr lang="en-US" sz="900" dirty="0">
                         <a:latin typeface="Yu Gothic" charset="0"/>
@@ -37668,7 +36927,7 @@
                           <a:ea typeface="Yu Gothic" pitchFamily="34" charset="-122"/>
                           <a:cs typeface="Yu Gothic" pitchFamily="34" charset="-120"/>
                         </a:rPr>
-                        <a:t>703万円</a:t>
+                        <a:t>720万円</a:t>
                       </a:r>
                       <a:endParaRPr lang="en-US" sz="900" dirty="0">
                         <a:latin typeface="Yu Gothic" charset="0"/>
@@ -37874,7 +37133,7 @@
                           <a:ea typeface="Yu Gothic" pitchFamily="34" charset="-122"/>
                           <a:cs typeface="Yu Gothic" pitchFamily="34" charset="-120"/>
                         </a:rPr>
-                        <a:t>＋12.5%</a:t>
+                        <a:t>＋10.0%</a:t>
                       </a:r>
                       <a:endParaRPr lang="en-US" sz="900" dirty="0">
                         <a:latin typeface="Yu Gothic" charset="0"/>
@@ -37942,7 +37201,7 @@
                           <a:ea typeface="Yu Gothic" pitchFamily="34" charset="-122"/>
                           <a:cs typeface="Yu Gothic" pitchFamily="34" charset="-120"/>
                         </a:rPr>
-                        <a:t>750万円</a:t>
+                        <a:t>733万円</a:t>
                       </a:r>
                       <a:endParaRPr lang="en-US" sz="900" dirty="0">
                         <a:latin typeface="Yu Gothic" charset="0"/>
@@ -38078,7 +37337,7 @@
                           <a:ea typeface="Yu Gothic" pitchFamily="34" charset="-122"/>
                           <a:cs typeface="Yu Gothic" pitchFamily="34" charset="-120"/>
                         </a:rPr>
-                        <a:t>737万円</a:t>
+                        <a:t>720万円</a:t>
                       </a:r>
                       <a:endParaRPr lang="en-US" sz="900" dirty="0">
                         <a:latin typeface="Yu Gothic" charset="0"/>
@@ -38284,7 +37543,7 @@
                           <a:ea typeface="Yu Gothic" pitchFamily="34" charset="-122"/>
                           <a:cs typeface="Yu Gothic" pitchFamily="34" charset="-120"/>
                         </a:rPr>
-                        <a:t>＋12.5%</a:t>
+                        <a:t>＋10.0%</a:t>
                       </a:r>
                       <a:endParaRPr lang="en-US" sz="900" dirty="0">
                         <a:latin typeface="Yu Gothic" charset="0"/>
@@ -38352,7 +37611,7 @@
                           <a:ea typeface="Yu Gothic" pitchFamily="34" charset="-122"/>
                           <a:cs typeface="Yu Gothic" pitchFamily="34" charset="-120"/>
                         </a:rPr>
-                        <a:t>750万円</a:t>
+                        <a:t>733万円</a:t>
                       </a:r>
                       <a:endParaRPr lang="en-US" sz="900" dirty="0">
                         <a:latin typeface="Yu Gothic" charset="0"/>
@@ -38488,7 +37747,7 @@
                           <a:ea typeface="Yu Gothic" pitchFamily="34" charset="-122"/>
                           <a:cs typeface="Yu Gothic" pitchFamily="34" charset="-120"/>
                         </a:rPr>
-                        <a:t>737万円</a:t>
+                        <a:t>720万円</a:t>
                       </a:r>
                       <a:endParaRPr lang="en-US" sz="900" dirty="0">
                         <a:latin typeface="Yu Gothic" charset="0"/>
@@ -38694,7 +37953,7 @@
                           <a:ea typeface="Yu Gothic" pitchFamily="34" charset="-122"/>
                           <a:cs typeface="Yu Gothic" pitchFamily="34" charset="-120"/>
                         </a:rPr>
-                        <a:t>＋12.5%</a:t>
+                        <a:t>＋10.0%</a:t>
                       </a:r>
                       <a:endParaRPr lang="en-US" sz="900" dirty="0">
                         <a:latin typeface="Yu Gothic" charset="0"/>
@@ -38762,7 +38021,7 @@
                           <a:ea typeface="Yu Gothic" pitchFamily="34" charset="-122"/>
                           <a:cs typeface="Yu Gothic" pitchFamily="34" charset="-120"/>
                         </a:rPr>
-                        <a:t>750万円</a:t>
+                        <a:t>733万円</a:t>
                       </a:r>
                       <a:endParaRPr lang="en-US" sz="900" dirty="0">
                         <a:latin typeface="Yu Gothic" charset="0"/>
@@ -38898,7 +38157,7 @@
                           <a:ea typeface="Yu Gothic" pitchFamily="34" charset="-122"/>
                           <a:cs typeface="Yu Gothic" pitchFamily="34" charset="-120"/>
                         </a:rPr>
-                        <a:t>737万円</a:t>
+                        <a:t>720万円</a:t>
                       </a:r>
                       <a:endParaRPr lang="en-US" sz="900" dirty="0">
                         <a:latin typeface="Yu Gothic" charset="0"/>
@@ -39104,7 +38363,7 @@
                           <a:ea typeface="Yu Gothic" pitchFamily="34" charset="-122"/>
                           <a:cs typeface="Yu Gothic" pitchFamily="34" charset="-120"/>
                         </a:rPr>
-                        <a:t>＋30.0%</a:t>
+                        <a:t>＋20.0%</a:t>
                       </a:r>
                       <a:endParaRPr lang="en-US" sz="900" dirty="0">
                         <a:latin typeface="Yu Gothic" charset="0"/>
@@ -39172,7 +38431,7 @@
                           <a:ea typeface="Yu Gothic" pitchFamily="34" charset="-122"/>
                           <a:cs typeface="Yu Gothic" pitchFamily="34" charset="-120"/>
                         </a:rPr>
-                        <a:t>217万円</a:t>
+                        <a:t>200万円</a:t>
                       </a:r>
                       <a:endParaRPr lang="en-US" sz="900" dirty="0">
                         <a:latin typeface="Yu Gothic" charset="0"/>
@@ -39308,7 +38567,7 @@
                           <a:ea typeface="Yu Gothic" pitchFamily="34" charset="-122"/>
                           <a:cs typeface="Yu Gothic" pitchFamily="34" charset="-120"/>
                         </a:rPr>
-                        <a:t>210万円</a:t>
+                        <a:t>193万円</a:t>
                       </a:r>
                       <a:endParaRPr lang="en-US" sz="900" dirty="0">
                         <a:latin typeface="Yu Gothic" charset="0"/>
@@ -39514,7 +38773,7 @@
                           <a:ea typeface="Yu Gothic" pitchFamily="34" charset="-122"/>
                           <a:cs typeface="Yu Gothic" pitchFamily="34" charset="-120"/>
                         </a:rPr>
-                        <a:t>＋30.0%</a:t>
+                        <a:t>＋20.0%</a:t>
                       </a:r>
                       <a:endParaRPr lang="en-US" sz="900" dirty="0">
                         <a:latin typeface="Yu Gothic" charset="0"/>
@@ -39582,7 +38841,7 @@
                           <a:ea typeface="Yu Gothic" pitchFamily="34" charset="-122"/>
                           <a:cs typeface="Yu Gothic" pitchFamily="34" charset="-120"/>
                         </a:rPr>
-                        <a:t>217万円</a:t>
+                        <a:t>200万円</a:t>
                       </a:r>
                       <a:endParaRPr lang="en-US" sz="900" dirty="0">
                         <a:latin typeface="Yu Gothic" charset="0"/>
@@ -39718,7 +38977,7 @@
                           <a:ea typeface="Yu Gothic" pitchFamily="34" charset="-122"/>
                           <a:cs typeface="Yu Gothic" pitchFamily="34" charset="-120"/>
                         </a:rPr>
-                        <a:t>210万円</a:t>
+                        <a:t>193万円</a:t>
                       </a:r>
                       <a:endParaRPr lang="en-US" sz="900" dirty="0">
                         <a:latin typeface="Yu Gothic" charset="0"/>
@@ -39924,7 +39183,7 @@
                           <a:ea typeface="Yu Gothic" pitchFamily="34" charset="-122"/>
                           <a:cs typeface="Yu Gothic" pitchFamily="34" charset="-120"/>
                         </a:rPr>
-                        <a:t>＋30.0%</a:t>
+                        <a:t>＋20.0%</a:t>
                       </a:r>
                       <a:endParaRPr lang="en-US" sz="900" dirty="0">
                         <a:latin typeface="Yu Gothic" charset="0"/>
@@ -39992,7 +39251,7 @@
                           <a:ea typeface="Yu Gothic" pitchFamily="34" charset="-122"/>
                           <a:cs typeface="Yu Gothic" pitchFamily="34" charset="-120"/>
                         </a:rPr>
-                        <a:t>217万円</a:t>
+                        <a:t>200万円</a:t>
                       </a:r>
                       <a:endParaRPr lang="en-US" sz="900" dirty="0">
                         <a:latin typeface="Yu Gothic" charset="0"/>
@@ -40128,7 +39387,7 @@
                           <a:ea typeface="Yu Gothic" pitchFamily="34" charset="-122"/>
                           <a:cs typeface="Yu Gothic" pitchFamily="34" charset="-120"/>
                         </a:rPr>
-                        <a:t>210万円</a:t>
+                        <a:t>193万円</a:t>
                       </a:r>
                       <a:endParaRPr lang="en-US" sz="900" dirty="0">
                         <a:latin typeface="Yu Gothic" charset="0"/>
@@ -40283,7 +39542,7 @@
                 <a:ea typeface="Cambria" pitchFamily="34" charset="-122"/>
                 <a:cs typeface="Cambria" pitchFamily="34" charset="-120"/>
               </a:rPr>
-              <a:t>11,400万円</a:t>
+              <a:t>11,200万円</a:t>
             </a:r>
             <a:endParaRPr lang="en-US" sz="2000" dirty="0"/>
           </a:p>
@@ -40325,7 +39584,7 @@
                 <a:ea typeface="Yu Gothic" pitchFamily="34" charset="-122"/>
                 <a:cs typeface="Yu Gothic" pitchFamily="34" charset="-120"/>
               </a:rPr>
-              <a:t>うち元本 1.00億円、上乗せ分 1,400万円</a:t>
+              <a:t>うち元本 1.00億円、上乗せ分 1,200万円</a:t>
             </a:r>
             <a:endParaRPr lang="en-US" sz="850" dirty="0"/>
           </a:p>
@@ -40577,7 +39836,7 @@
                 <a:ea typeface="Cambria" pitchFamily="34" charset="-122"/>
                 <a:cs typeface="Cambria" pitchFamily="34" charset="-120"/>
               </a:rPr>
-              <a:t>1,160万円</a:t>
+              <a:t>960万円</a:t>
             </a:r>
             <a:endParaRPr lang="en-US" sz="2000" dirty="0"/>
           </a:p>
@@ -40619,7 +39878,7 @@
                 <a:ea typeface="Yu Gothic" pitchFamily="34" charset="-122"/>
                 <a:cs typeface="Yu Gothic" pitchFamily="34" charset="-120"/>
               </a:rPr>
-              <a:t>想定IRR 15.7%（年率）</a:t>
+              <a:t>想定IRR 13.2%（年率）</a:t>
             </a:r>
             <a:endParaRPr lang="en-US" sz="850" dirty="0"/>
           </a:p>
@@ -41419,7 +40678,7 @@
                           <a:ea typeface="Yu Gothic" pitchFamily="34" charset="-122"/>
                           <a:cs typeface="Yu Gothic" pitchFamily="34" charset="-120"/>
                         </a:rPr>
-                        <a:t>16.1%</a:t>
+                        <a:t>16.3%</a:t>
                       </a:r>
                       <a:endParaRPr lang="en-US" sz="950" dirty="0">
                         <a:latin typeface="Yu Gothic" charset="0"/>
@@ -41761,7 +41020,7 @@
                           <a:ea typeface="Yu Gothic" pitchFamily="34" charset="-122"/>
                           <a:cs typeface="Yu Gothic" pitchFamily="34" charset="-120"/>
                         </a:rPr>
-                        <a:t>15.7%</a:t>
+                        <a:t>13.2%</a:t>
                       </a:r>
                       <a:endParaRPr lang="en-US" sz="950" dirty="0">
                         <a:latin typeface="Yu Gothic" charset="0"/>
@@ -41829,7 +41088,7 @@
                           <a:ea typeface="Yu Gothic" pitchFamily="34" charset="-122"/>
                           <a:cs typeface="Yu Gothic" pitchFamily="34" charset="-120"/>
                         </a:rPr>
-                        <a:t>1,160万円</a:t>
+                        <a:t>960万円</a:t>
                       </a:r>
                       <a:endParaRPr lang="en-US" sz="950" dirty="0">
                         <a:latin typeface="Yu Gothic" charset="0"/>
@@ -41897,7 +41156,7 @@
                           <a:ea typeface="Yu Gothic" pitchFamily="34" charset="-122"/>
                           <a:cs typeface="Yu Gothic" pitchFamily="34" charset="-120"/>
                         </a:rPr>
-                        <a:t>11.6%</a:t>
+                        <a:t>9.6%</a:t>
                       </a:r>
                       <a:endParaRPr lang="en-US" sz="950" dirty="0">
                         <a:latin typeface="Yu Gothic" charset="0"/>
@@ -42103,7 +41362,7 @@
                           <a:ea typeface="Yu Gothic" pitchFamily="34" charset="-122"/>
                           <a:cs typeface="Yu Gothic" pitchFamily="34" charset="-120"/>
                         </a:rPr>
-                        <a:t>16.4%</a:t>
+                        <a:t>12.0%</a:t>
                       </a:r>
                       <a:endParaRPr lang="en-US" sz="950" dirty="0">
                         <a:latin typeface="Yu Gothic" charset="0"/>
@@ -42171,7 +41430,7 @@
                           <a:ea typeface="Yu Gothic" pitchFamily="34" charset="-122"/>
                           <a:cs typeface="Yu Gothic" pitchFamily="34" charset="-120"/>
                         </a:rPr>
-                        <a:t>1,760万円</a:t>
+                        <a:t>1,260万円</a:t>
                       </a:r>
                       <a:endParaRPr lang="en-US" sz="950" dirty="0">
                         <a:latin typeface="Yu Gothic" charset="0"/>
@@ -42239,7 +41498,7 @@
                           <a:ea typeface="Yu Gothic" pitchFamily="34" charset="-122"/>
                           <a:cs typeface="Yu Gothic" pitchFamily="34" charset="-120"/>
                         </a:rPr>
-                        <a:t>17.6%</a:t>
+                        <a:t>12.6%</a:t>
                       </a:r>
                       <a:endParaRPr lang="en-US" sz="950" dirty="0">
                         <a:latin typeface="Yu Gothic" charset="0"/>
@@ -42445,7 +41704,7 @@
                           <a:ea typeface="Yu Gothic" pitchFamily="34" charset="-122"/>
                           <a:cs typeface="Yu Gothic" pitchFamily="34" charset="-120"/>
                         </a:rPr>
-                        <a:t>16.7%</a:t>
+                        <a:t>11.5%</a:t>
                       </a:r>
                       <a:endParaRPr lang="en-US" sz="950" dirty="0">
                         <a:latin typeface="Yu Gothic" charset="0"/>
@@ -42513,7 +41772,7 @@
                           <a:ea typeface="Yu Gothic" pitchFamily="34" charset="-122"/>
                           <a:cs typeface="Yu Gothic" pitchFamily="34" charset="-120"/>
                         </a:rPr>
-                        <a:t>2,160万円</a:t>
+                        <a:t>1,460万円</a:t>
                       </a:r>
                       <a:endParaRPr lang="en-US" sz="950" dirty="0">
                         <a:latin typeface="Yu Gothic" charset="0"/>
@@ -42581,7 +41840,7 @@
                           <a:ea typeface="Yu Gothic" pitchFamily="34" charset="-122"/>
                           <a:cs typeface="Yu Gothic" pitchFamily="34" charset="-120"/>
                         </a:rPr>
-                        <a:t>21.6%</a:t>
+                        <a:t>14.6%</a:t>
                       </a:r>
                       <a:endParaRPr lang="en-US" sz="950" dirty="0">
                         <a:latin typeface="Yu Gothic" charset="0"/>
@@ -42739,7 +41998,7 @@
                 <a:ea typeface="Yu Gothic" pitchFamily="34" charset="-122"/>
                 <a:cs typeface="Yu Gothic" pitchFamily="34" charset="-120"/>
               </a:rPr>
-              <a:t>IRRは「戻った資金を同じ利回りで再投資できる」前提の指標である。1年以内に売り切れた場合、IRRは 16.1% となるが、実際にお手元に残るのは 840万円（ご投資額に対して 8.4%）にとどまる。資金が早く戻るぶん拘束期間が短く、そのぶん受取額も小さくなるためである。</a:t>
+              <a:t>IRRは「戻った資金を同じ利回りで再投資できる」前提の指標である。1年以内に売り切れた場合、IRRは 16.3% となるが、実際にお手元に残るのは 840万円（ご投資額に対して 8.4%）にとどまる。資金が早く戻るぶん拘束期間が短く、そのぶん受取額も小さくなるためである。</a:t>
             </a:r>
             <a:endParaRPr lang="en-US" sz="950" dirty="0"/>
           </a:p>
@@ -44098,7 +43357,7 @@
                 <a:ea typeface="Yu Gothic" pitchFamily="34" charset="-122"/>
                 <a:cs typeface="Yu Gothic" pitchFamily="34" charset="-120"/>
               </a:rPr>
-              <a:t>貴社が受け取る金額（簿価＋7.5%／12.5%／30.0%）も、精算のタイミング（毎月）も、AとBで変わらない。2案を所轄税務署の酒類指導官にご提示し、貴社側に酒類販売業免許が不要と整理できるほうを採用する。</a:t>
+              <a:t>貴社が受け取る金額（簿価＋10.0%／20.0%／30.0%）も、精算のタイミング（毎月）も、AとBで変わらない。2案を所轄税務署の酒類指導官にご提示し、貴社側に酒類販売業免許が不要と整理できるほうを採用する。</a:t>
             </a:r>
             <a:endParaRPr lang="en-US" sz="950" dirty="0"/>
           </a:p>
